--- a/presentation.pptx
+++ b/presentation.pptx
@@ -4,19 +4,22 @@
   <p:sldMasterIdLst>
     <p:sldMasterId id="2147483648" r:id="rId1"/>
   </p:sldMasterIdLst>
+  <p:notesMasterIdLst>
+    <p:notesMasterId r:id="rId12"/>
+  </p:notesMasterIdLst>
   <p:sldIdLst>
-    <p:sldId id="256" r:id="rId7"/>
-    <p:sldId id="257" r:id="rId9"/>
-    <p:sldId id="258" r:id="rId10"/>
-    <p:sldId id="259" r:id="rId11"/>
-    <p:sldId id="260" r:id="rId12"/>
-    <p:sldId id="261" r:id="rId13"/>
-    <p:sldId id="262" r:id="rId14"/>
-    <p:sldId id="263" r:id="rId15"/>
-    <p:sldId id="264" r:id="rId16"/>
-    <p:sldId id="265" r:id="rId17"/>
+    <p:sldId id="256" r:id="rId2"/>
+    <p:sldId id="257" r:id="rId3"/>
+    <p:sldId id="258" r:id="rId4"/>
+    <p:sldId id="259" r:id="rId5"/>
+    <p:sldId id="260" r:id="rId6"/>
+    <p:sldId id="261" r:id="rId7"/>
+    <p:sldId id="262" r:id="rId8"/>
+    <p:sldId id="263" r:id="rId9"/>
+    <p:sldId id="264" r:id="rId10"/>
+    <p:sldId id="265" r:id="rId11"/>
   </p:sldIdLst>
-  <p:sldSz cx="12191695" cy="6858000" type="screen4x3"/>
+  <p:sldSz cx="12192000" cy="6858000"/>
   <p:notesSz cx="6858000" cy="9144000"/>
   <p:defaultTextStyle>
     <a:defPPr>
@@ -113,18 +116,39 @@
       </a:defRPr>
     </a:lvl9pPr>
   </p:defaultTextStyle>
+  <p:extLst>
+    <p:ext uri="{EFAFB233-063F-42B5-8137-9DF3F51BA10A}">
+      <p15:sldGuideLst xmlns:p15="http://schemas.microsoft.com/office/powerpoint/2012/main">
+        <p15:guide id="1" orient="horz" pos="2160">
+          <p15:clr>
+            <a:srgbClr val="A4A3A4"/>
+          </p15:clr>
+        </p15:guide>
+        <p15:guide id="2" pos="2880">
+          <p15:clr>
+            <a:srgbClr val="A4A3A4"/>
+          </p15:clr>
+        </p15:guide>
+      </p15:sldGuideLst>
+    </p:ext>
+  </p:extLst>
 </p:presentation>
 </file>
 
 <file path=ppt/charts/chart1.xml><?xml version="1.0" encoding="utf-8"?>
-<c:chartSpace xmlns:c="http://schemas.openxmlformats.org/drawingml/2006/chart" xmlns:a="http://schemas.openxmlformats.org/drawingml/2006/main" xmlns:r="http://schemas.openxmlformats.org/officeDocument/2006/relationships">
+<c:chartSpace xmlns:c="http://schemas.openxmlformats.org/drawingml/2006/chart" xmlns:a="http://schemas.openxmlformats.org/drawingml/2006/main" xmlns:r="http://schemas.openxmlformats.org/officeDocument/2006/relationships" xmlns:c16r2="http://schemas.microsoft.com/office/drawing/2015/06/chart">
   <c:date1904 val="0"/>
+  <c:lang val="en-GB"/>
+  <c:roundedCorners val="1"/>
+  <c:style val="2"/>
   <c:chart>
     <c:autoTitleDeleted val="1"/>
     <c:plotArea>
+      <c:layout/>
       <c:barChart>
         <c:barDir val="col"/>
         <c:grouping val="clustered"/>
+        <c:varyColors val="1"/>
         <c:ser>
           <c:idx val="0"/>
           <c:order val="0"/>
@@ -147,6 +171,7 @@
               <a:noFill/>
             </a:ln>
           </c:spPr>
+          <c:invertIfNegative val="1"/>
           <c:cat>
             <c:strRef>
               <c:f>Sheet1!$A$2:$A$5</c:f>
@@ -174,20 +199,37 @@
                 <c:formatCode>General</c:formatCode>
                 <c:ptCount val="4"/>
                 <c:pt idx="0">
-                  <c:v>99.052</c:v>
+                  <c:v>99.052000000000007</c:v>
                 </c:pt>
                 <c:pt idx="1">
-                  <c:v>170.561</c:v>
+                  <c:v>170.56100000000001</c:v>
                 </c:pt>
                 <c:pt idx="2">
                   <c:v>277.291</c:v>
                 </c:pt>
                 <c:pt idx="3">
-                  <c:v>214.884</c:v>
+                  <c:v>214.88399999999999</c:v>
                 </c:pt>
               </c:numCache>
             </c:numRef>
           </c:val>
+          <c:extLst>
+            <c:ext xmlns:c14="http://schemas.microsoft.com/office/drawing/2007/8/2/chart" uri="{6F2FDCE9-48DA-4B69-8628-5D25D57E5C99}">
+              <c14:invertSolidFillFmt>
+                <c14:spPr xmlns:c14="http://schemas.microsoft.com/office/drawing/2007/8/2/chart">
+                  <a:solidFill>
+                    <a:srgbClr val="FFFFFF"/>
+                  </a:solidFill>
+                  <a:ln>
+                    <a:noFill/>
+                  </a:ln>
+                </c14:spPr>
+              </c14:invertSolidFillFmt>
+            </c:ext>
+            <c:ext xmlns:c16="http://schemas.microsoft.com/office/drawing/2014/chart" uri="{C3380CC4-5D6E-409C-BE32-E72D297353CC}">
+              <c16:uniqueId val="{00000000-1959-4931-8849-28F0D312239D}"/>
+            </c:ext>
+          </c:extLst>
         </c:ser>
         <c:ser>
           <c:idx val="1"/>
@@ -211,6 +253,7 @@
               <a:noFill/>
             </a:ln>
           </c:spPr>
+          <c:invertIfNegative val="1"/>
           <c:cat>
             <c:strRef>
               <c:f>Sheet1!$A$2:$A$5</c:f>
@@ -238,13 +281,13 @@
                 <c:formatCode>General</c:formatCode>
                 <c:ptCount val="4"/>
                 <c:pt idx="0">
-                  <c:v>1.654</c:v>
+                  <c:v>1.6539999999999999</c:v>
                 </c:pt>
                 <c:pt idx="1">
                   <c:v>147.185</c:v>
                 </c:pt>
                 <c:pt idx="2">
-                  <c:v>374.443</c:v>
+                  <c:v>374.44299999999998</c:v>
                 </c:pt>
                 <c:pt idx="3">
                   <c:v>225.905</c:v>
@@ -252,6 +295,23 @@
               </c:numCache>
             </c:numRef>
           </c:val>
+          <c:extLst>
+            <c:ext xmlns:c14="http://schemas.microsoft.com/office/drawing/2007/8/2/chart" uri="{6F2FDCE9-48DA-4B69-8628-5D25D57E5C99}">
+              <c14:invertSolidFillFmt>
+                <c14:spPr xmlns:c14="http://schemas.microsoft.com/office/drawing/2007/8/2/chart">
+                  <a:solidFill>
+                    <a:srgbClr val="FFFFFF"/>
+                  </a:solidFill>
+                  <a:ln>
+                    <a:noFill/>
+                  </a:ln>
+                </c14:spPr>
+              </c14:invertSolidFillFmt>
+            </c:ext>
+            <c:ext xmlns:c16="http://schemas.microsoft.com/office/drawing/2014/chart" uri="{C3380CC4-5D6E-409C-BE32-E72D297353CC}">
+              <c16:uniqueId val="{00000001-1959-4931-8849-28F0D312239D}"/>
+            </c:ext>
+          </c:extLst>
         </c:ser>
         <c:ser>
           <c:idx val="2"/>
@@ -275,8 +335,16 @@
               <a:noFill/>
             </a:ln>
           </c:spPr>
+          <c:invertIfNegative val="1"/>
           <c:dLbls>
             <c:numFmt formatCode="0.0&quot; ms&quot;" sourceLinked="0"/>
+            <c:spPr>
+              <a:noFill/>
+              <a:ln>
+                <a:noFill/>
+              </a:ln>
+              <a:effectLst/>
+            </c:spPr>
             <c:txPr>
               <a:bodyPr/>
               <a:lstStyle/>
@@ -288,6 +356,7 @@
                     </a:solidFill>
                   </a:defRPr>
                 </a:pPr>
+                <a:endParaRPr lang="en-US"/>
               </a:p>
             </c:txPr>
             <c:dLblPos val="outEnd"/>
@@ -297,7 +366,12 @@
             <c:showSerName val="0"/>
             <c:showPercent val="0"/>
             <c:showBubbleSize val="0"/>
-            <c:showLeaderLines val="1"/>
+            <c:showLeaderLines val="0"/>
+            <c:extLst>
+              <c:ext xmlns:c15="http://schemas.microsoft.com/office/drawing/2012/chart" uri="{CE6537A1-D6FC-4f65-9D91-7224C49458BB}">
+                <c15:showLeaderLines val="0"/>
+              </c:ext>
+            </c:extLst>
           </c:dLbls>
           <c:cat>
             <c:strRef>
@@ -326,21 +400,46 @@
                 <c:formatCode>General</c:formatCode>
                 <c:ptCount val="4"/>
                 <c:pt idx="0">
-                  <c:v>0.367</c:v>
+                  <c:v>0.36699999999999999</c:v>
                 </c:pt>
                 <c:pt idx="1">
                   <c:v>2.742</c:v>
                 </c:pt>
                 <c:pt idx="2">
-                  <c:v>8.369</c:v>
+                  <c:v>8.3689999999999998</c:v>
                 </c:pt>
                 <c:pt idx="3">
-                  <c:v>2.784</c:v>
+                  <c:v>2.7839999999999998</c:v>
                 </c:pt>
               </c:numCache>
             </c:numRef>
           </c:val>
+          <c:extLst>
+            <c:ext xmlns:c14="http://schemas.microsoft.com/office/drawing/2007/8/2/chart" uri="{6F2FDCE9-48DA-4B69-8628-5D25D57E5C99}">
+              <c14:invertSolidFillFmt>
+                <c14:spPr xmlns:c14="http://schemas.microsoft.com/office/drawing/2007/8/2/chart">
+                  <a:solidFill>
+                    <a:srgbClr val="FFFFFF"/>
+                  </a:solidFill>
+                  <a:ln>
+                    <a:noFill/>
+                  </a:ln>
+                </c14:spPr>
+              </c14:invertSolidFillFmt>
+            </c:ext>
+            <c:ext xmlns:c16="http://schemas.microsoft.com/office/drawing/2014/chart" uri="{C3380CC4-5D6E-409C-BE32-E72D297353CC}">
+              <c16:uniqueId val="{00000002-1959-4931-8849-28F0D312239D}"/>
+            </c:ext>
+          </c:extLst>
         </c:ser>
+        <c:dLbls>
+          <c:showLegendKey val="0"/>
+          <c:showVal val="0"/>
+          <c:showCatName val="0"/>
+          <c:showSerName val="0"/>
+          <c:showPercent val="0"/>
+          <c:showBubbleSize val="0"/>
+        </c:dLbls>
         <c:gapWidth val="60"/>
         <c:overlap val="-10"/>
         <c:axId val="-2068027336"/>
@@ -353,6 +452,7 @@
         </c:scaling>
         <c:delete val="0"/>
         <c:axPos val="b"/>
+        <c:numFmt formatCode="General" sourceLinked="0"/>
         <c:majorTickMark val="out"/>
         <c:minorTickMark val="none"/>
         <c:tickLblPos val="nextTo"/>
@@ -370,6 +470,7 @@
             <a:pPr>
               <a:defRPr sz="1800"/>
             </a:pPr>
+            <a:endParaRPr lang="en-US"/>
           </a:p>
         </c:txPr>
         <c:crossAx val="-2113994440"/>
@@ -383,7 +484,8 @@
         <c:axId val="-2113994440"/>
         <c:scaling>
           <c:logBase val="10"/>
-          <c:max val="1000.0"/>
+          <c:orientation val="minMax"/>
+          <c:max val="1000"/>
           <c:min val="0.1"/>
         </c:scaling>
         <c:delete val="0"/>
@@ -414,9 +516,9 @@
               </a:p>
             </c:rich>
           </c:tx>
-          <c:layout/>
           <c:overlay val="0"/>
         </c:title>
+        <c:numFmt formatCode="General" sourceLinked="1"/>
         <c:majorTickMark val="out"/>
         <c:minorTickMark val="none"/>
         <c:tickLblPos val="nextTo"/>
@@ -436,10 +538,12 @@
                 </a:solidFill>
               </a:defRPr>
             </a:pPr>
+            <a:endParaRPr lang="en-US"/>
           </a:p>
         </c:txPr>
         <c:crossAx val="-2068027336"/>
         <c:crosses val="autoZero"/>
+        <c:crossBetween val="between"/>
       </c:valAx>
     </c:plotArea>
     <c:legend>
@@ -452,10 +556,13 @@
           <a:pPr>
             <a:defRPr sz="1800"/>
           </a:pPr>
+          <a:endParaRPr lang="en-US"/>
         </a:p>
       </c:txPr>
     </c:legend>
+    <c:plotVisOnly val="1"/>
     <c:dispBlanksAs val="gap"/>
+    <c:showDLblsOverMax val="1"/>
   </c:chart>
   <c:txPr>
     <a:bodyPr/>
@@ -479,14 +586,19 @@
 </file>
 
 <file path=ppt/charts/chart2.xml><?xml version="1.0" encoding="utf-8"?>
-<c:chartSpace xmlns:c="http://schemas.openxmlformats.org/drawingml/2006/chart" xmlns:a="http://schemas.openxmlformats.org/drawingml/2006/main" xmlns:r="http://schemas.openxmlformats.org/officeDocument/2006/relationships">
+<c:chartSpace xmlns:c="http://schemas.openxmlformats.org/drawingml/2006/chart" xmlns:a="http://schemas.openxmlformats.org/drawingml/2006/main" xmlns:r="http://schemas.openxmlformats.org/officeDocument/2006/relationships" xmlns:c16r2="http://schemas.microsoft.com/office/drawing/2015/06/chart">
   <c:date1904 val="0"/>
+  <c:lang val="en-GB"/>
+  <c:roundedCorners val="1"/>
+  <c:style val="2"/>
   <c:chart>
     <c:autoTitleDeleted val="1"/>
     <c:plotArea>
+      <c:layout/>
       <c:barChart>
         <c:barDir val="bar"/>
         <c:grouping val="clustered"/>
+        <c:varyColors val="1"/>
         <c:ser>
           <c:idx val="0"/>
           <c:order val="0"/>
@@ -509,7 +621,15 @@
               <a:noFill/>
             </a:ln>
           </c:spPr>
+          <c:invertIfNegative val="1"/>
           <c:dLbls>
+            <c:spPr>
+              <a:noFill/>
+              <a:ln>
+                <a:noFill/>
+              </a:ln>
+              <a:effectLst/>
+            </c:spPr>
             <c:txPr>
               <a:bodyPr/>
               <a:lstStyle/>
@@ -521,6 +641,7 @@
                     </a:solidFill>
                   </a:defRPr>
                 </a:pPr>
+                <a:endParaRPr lang="en-US"/>
               </a:p>
             </c:txPr>
             <c:dLblPos val="outEnd"/>
@@ -530,7 +651,12 @@
             <c:showSerName val="0"/>
             <c:showPercent val="0"/>
             <c:showBubbleSize val="0"/>
-            <c:showLeaderLines val="1"/>
+            <c:showLeaderLines val="0"/>
+            <c:extLst>
+              <c:ext xmlns:c15="http://schemas.microsoft.com/office/drawing/2012/chart" uri="{CE6537A1-D6FC-4f65-9D91-7224C49458BB}">
+                <c15:showLeaderLines val="0"/>
+              </c:ext>
+            </c:extLst>
           </c:dLbls>
           <c:cat>
             <c:strRef>
@@ -585,7 +711,32 @@
               </c:numCache>
             </c:numRef>
           </c:val>
+          <c:extLst>
+            <c:ext xmlns:c14="http://schemas.microsoft.com/office/drawing/2007/8/2/chart" uri="{6F2FDCE9-48DA-4B69-8628-5D25D57E5C99}">
+              <c14:invertSolidFillFmt>
+                <c14:spPr xmlns:c14="http://schemas.microsoft.com/office/drawing/2007/8/2/chart">
+                  <a:solidFill>
+                    <a:srgbClr val="FFFFFF"/>
+                  </a:solidFill>
+                  <a:ln>
+                    <a:noFill/>
+                  </a:ln>
+                </c14:spPr>
+              </c14:invertSolidFillFmt>
+            </c:ext>
+            <c:ext xmlns:c16="http://schemas.microsoft.com/office/drawing/2014/chart" uri="{C3380CC4-5D6E-409C-BE32-E72D297353CC}">
+              <c16:uniqueId val="{00000000-9BBC-4CFD-A40B-B6BF1CA3C778}"/>
+            </c:ext>
+          </c:extLst>
         </c:ser>
+        <c:dLbls>
+          <c:showLegendKey val="0"/>
+          <c:showVal val="0"/>
+          <c:showCatName val="0"/>
+          <c:showSerName val="0"/>
+          <c:showPercent val="0"/>
+          <c:showBubbleSize val="0"/>
+        </c:dLbls>
         <c:gapWidth val="55"/>
         <c:axId val="-2068027336"/>
         <c:axId val="-2113994440"/>
@@ -597,6 +748,7 @@
         </c:scaling>
         <c:delete val="0"/>
         <c:axPos val="l"/>
+        <c:numFmt formatCode="General" sourceLinked="0"/>
         <c:majorTickMark val="out"/>
         <c:minorTickMark val="none"/>
         <c:tickLblPos val="nextTo"/>
@@ -614,6 +766,7 @@
             <a:pPr>
               <a:defRPr sz="1800"/>
             </a:pPr>
+            <a:endParaRPr lang="en-US"/>
           </a:p>
         </c:txPr>
         <c:crossAx val="-2113994440"/>
@@ -626,19 +779,24 @@
       <c:valAx>
         <c:axId val="-2113994440"/>
         <c:scaling>
+          <c:orientation val="minMax"/>
           <c:max val="44.4"/>
-          <c:min val="0.0"/>
+          <c:min val="0"/>
         </c:scaling>
-        <c:delete/>
-        <c:axPos val="b"/>
+        <c:delete val="1"/>
+        <c:axPos val="t"/>
+        <c:numFmt formatCode="General" sourceLinked="1"/>
         <c:majorTickMark val="out"/>
         <c:minorTickMark val="none"/>
         <c:tickLblPos val="nextTo"/>
         <c:crossAx val="-2068027336"/>
         <c:crosses val="autoZero"/>
+        <c:crossBetween val="between"/>
       </c:valAx>
     </c:plotArea>
+    <c:plotVisOnly val="1"/>
     <c:dispBlanksAs val="gap"/>
+    <c:showDLblsOverMax val="1"/>
   </c:chart>
   <c:txPr>
     <a:bodyPr/>
@@ -662,7 +820,7 @@
 </file>
 
 <file path=ppt/notesMasters/notesMaster1.xml><?xml version="1.0" encoding="utf-8"?>
-<p:notesMaster xmlns:a="http://schemas.openxmlformats.org/drawingml/2006/main" xmlns:p="http://schemas.openxmlformats.org/presentationml/2006/main" xmlns:r="http://schemas.openxmlformats.org/officeDocument/2006/relationships">
+<p:notesMaster xmlns:a="http://schemas.openxmlformats.org/drawingml/2006/main" xmlns:r="http://schemas.openxmlformats.org/officeDocument/2006/relationships" xmlns:p="http://schemas.openxmlformats.org/presentationml/2006/main">
   <p:cSld>
     <p:bg>
       <p:bgRef idx="1001">
@@ -683,241 +841,16 @@
           <a:chExt cx="0" cy="0"/>
         </a:xfrm>
       </p:grpSpPr>
-      <p:sp>
-        <p:nvSpPr>
-          <p:cNvPr id="2" name="Header Placeholder 1"/>
-          <p:cNvSpPr>
-            <a:spLocks noGrp="1"/>
-          </p:cNvSpPr>
-          <p:nvPr>
-            <p:ph type="hdr" sz="quarter"/>
-          </p:nvPr>
-        </p:nvSpPr>
-        <p:spPr>
-          <a:xfrm>
-            <a:off x="0" y="0"/>
-            <a:ext cx="2971800" cy="457200"/>
-          </a:xfrm>
-          <a:prstGeom prst="rect">
-            <a:avLst/>
-          </a:prstGeom>
-        </p:spPr>
-        <p:txBody>
-          <a:bodyPr vert="horz" lIns="91440" tIns="45720" rIns="91440" bIns="45720" rtlCol="0"/>
-          <a:lstStyle>
-            <a:lvl1pPr algn="l">
-              <a:defRPr sz="1200"/>
-            </a:lvl1pPr>
-          </a:lstStyle>
-          <a:p>
-            <a:endParaRPr lang="en-US"/>
-          </a:p>
-        </p:txBody>
-      </p:sp>
-      <p:sp>
-        <p:nvSpPr>
-          <p:cNvPr id="3" name="Date Placeholder 2"/>
-          <p:cNvSpPr>
-            <a:spLocks noGrp="1"/>
-          </p:cNvSpPr>
-          <p:nvPr>
-            <p:ph type="dt" idx="1"/>
-          </p:nvPr>
-        </p:nvSpPr>
-        <p:spPr>
-          <a:xfrm>
-            <a:off x="3884613" y="0"/>
-            <a:ext cx="2971800" cy="457200"/>
-          </a:xfrm>
-          <a:prstGeom prst="rect">
-            <a:avLst/>
-          </a:prstGeom>
-        </p:spPr>
-        <p:txBody>
-          <a:bodyPr vert="horz" lIns="91440" tIns="45720" rIns="91440" bIns="45720" rtlCol="0"/>
-          <a:lstStyle>
-            <a:lvl1pPr algn="r">
-              <a:defRPr sz="1200"/>
-            </a:lvl1pPr>
-          </a:lstStyle>
-          <a:p>
-            <a:fld id="{0F89C1C7-3DCD-1040-A9CF-14679D8B5DDD}" type="datetimeFigureOut">
-              <a:rPr lang="en-US" smtClean="0"/>
-              <a:t>10/17/16</a:t>
-            </a:fld>
-            <a:endParaRPr lang="en-US"/>
-          </a:p>
-        </p:txBody>
-      </p:sp>
-      <p:sp>
-        <p:nvSpPr>
-          <p:cNvPr id="4" name="Slide Image Placeholder 3"/>
-          <p:cNvSpPr>
-            <a:spLocks noGrp="1" noRot="1" noChangeAspect="1"/>
-          </p:cNvSpPr>
-          <p:nvPr>
-            <p:ph type="sldImg" idx="2"/>
-          </p:nvPr>
-        </p:nvSpPr>
-        <p:spPr>
-          <a:xfrm>
-            <a:off x="1143000" y="685800"/>
-            <a:ext cx="4572000" cy="3429000"/>
-          </a:xfrm>
-          <a:prstGeom prst="rect">
-            <a:avLst/>
-          </a:prstGeom>
-          <a:noFill/>
-          <a:ln w="12700">
-            <a:solidFill>
-              <a:prstClr val="black"/>
-            </a:solidFill>
-          </a:ln>
-        </p:spPr>
-        <p:txBody>
-          <a:bodyPr vert="horz" lIns="91440" tIns="45720" rIns="91440" bIns="45720" rtlCol="0" anchor="ctr"/>
-          <a:lstStyle/>
-          <a:p>
-            <a:endParaRPr lang="en-US"/>
-          </a:p>
-        </p:txBody>
-      </p:sp>
-      <p:sp>
-        <p:nvSpPr>
-          <p:cNvPr id="5" name="Notes Placeholder 4"/>
-          <p:cNvSpPr>
-            <a:spLocks noGrp="1"/>
-          </p:cNvSpPr>
-          <p:nvPr>
-            <p:ph type="body" sz="quarter" idx="3"/>
-          </p:nvPr>
-        </p:nvSpPr>
-        <p:spPr>
-          <a:xfrm>
-            <a:off x="685800" y="4343400"/>
-            <a:ext cx="5486400" cy="4114800"/>
-          </a:xfrm>
-          <a:prstGeom prst="rect">
-            <a:avLst/>
-          </a:prstGeom>
-        </p:spPr>
-        <p:txBody>
-          <a:bodyPr vert="horz" lIns="91440" tIns="45720" rIns="91440" bIns="45720" rtlCol="0"/>
-          <a:lstStyle/>
-          <a:p>
-            <a:pPr lvl="0"/>
-            <a:r>
-              <a:rPr lang="en-US" smtClean="0"/>
-              <a:t>Click to edit Master text styles</a:t>
-            </a:r>
-          </a:p>
-          <a:p>
-            <a:pPr lvl="1"/>
-            <a:r>
-              <a:rPr lang="en-US" smtClean="0"/>
-              <a:t>Second level</a:t>
-            </a:r>
-          </a:p>
-          <a:p>
-            <a:pPr lvl="2"/>
-            <a:r>
-              <a:rPr lang="en-US" smtClean="0"/>
-              <a:t>Third level</a:t>
-            </a:r>
-          </a:p>
-          <a:p>
-            <a:pPr lvl="3"/>
-            <a:r>
-              <a:rPr lang="en-US" smtClean="0"/>
-              <a:t>Fourth level</a:t>
-            </a:r>
-          </a:p>
-          <a:p>
-            <a:pPr lvl="4"/>
-            <a:r>
-              <a:rPr lang="en-US" smtClean="0"/>
-              <a:t>Fifth level</a:t>
-            </a:r>
-            <a:endParaRPr lang="en-US"/>
-          </a:p>
-        </p:txBody>
-      </p:sp>
-      <p:sp>
-        <p:nvSpPr>
-          <p:cNvPr id="6" name="Footer Placeholder 5"/>
-          <p:cNvSpPr>
-            <a:spLocks noGrp="1"/>
-          </p:cNvSpPr>
-          <p:nvPr>
-            <p:ph type="ftr" sz="quarter" idx="4"/>
-          </p:nvPr>
-        </p:nvSpPr>
-        <p:spPr>
-          <a:xfrm>
-            <a:off x="0" y="8685213"/>
-            <a:ext cx="2971800" cy="457200"/>
-          </a:xfrm>
-          <a:prstGeom prst="rect">
-            <a:avLst/>
-          </a:prstGeom>
-        </p:spPr>
-        <p:txBody>
-          <a:bodyPr vert="horz" lIns="91440" tIns="45720" rIns="91440" bIns="45720" rtlCol="0" anchor="b"/>
-          <a:lstStyle>
-            <a:lvl1pPr algn="l">
-              <a:defRPr sz="1200"/>
-            </a:lvl1pPr>
-          </a:lstStyle>
-          <a:p>
-            <a:endParaRPr lang="en-US"/>
-          </a:p>
-        </p:txBody>
-      </p:sp>
-      <p:sp>
-        <p:nvSpPr>
-          <p:cNvPr id="7" name="Slide Number Placeholder 6"/>
-          <p:cNvSpPr>
-            <a:spLocks noGrp="1"/>
-          </p:cNvSpPr>
-          <p:nvPr>
-            <p:ph type="sldNum" sz="quarter" idx="5"/>
-          </p:nvPr>
-        </p:nvSpPr>
-        <p:spPr>
-          <a:xfrm>
-            <a:off x="3884613" y="8685213"/>
-            <a:ext cx="2971800" cy="457200"/>
-          </a:xfrm>
-          <a:prstGeom prst="rect">
-            <a:avLst/>
-          </a:prstGeom>
-        </p:spPr>
-        <p:txBody>
-          <a:bodyPr vert="horz" lIns="91440" tIns="45720" rIns="91440" bIns="45720" rtlCol="0" anchor="b"/>
-          <a:lstStyle>
-            <a:lvl1pPr algn="r">
-              <a:defRPr sz="1200"/>
-            </a:lvl1pPr>
-          </a:lstStyle>
-          <a:p>
-            <a:fld id="{BB5E49A5-4136-284D-997B-48E1D791AD67}" type="slidenum">
-              <a:rPr lang="en-US" smtClean="0"/>
-              <a:t>‹#›</a:t>
-            </a:fld>
-            <a:endParaRPr lang="en-US"/>
-          </a:p>
-        </p:txBody>
-      </p:sp>
     </p:spTree>
     <p:extLst>
       <p:ext uri="{BB962C8B-B14F-4D97-AF65-F5344CB8AC3E}">
-        <p14:creationId xmlns:p14="http://schemas.microsoft.com/office/powerpoint/2010/main" val="2623252185"/>
+        <p14:creationId xmlns:p14="http://schemas.microsoft.com/office/powerpoint/2010/main" val="663744704"/>
       </p:ext>
     </p:extLst>
   </p:cSld>
   <p:clrMap bg1="lt1" tx1="dk1" bg2="lt2" tx2="dk2" accent1="accent1" accent2="accent2" accent3="accent3" accent4="accent4" accent5="accent5" accent6="accent6" hlink="hlink" folHlink="folHlink"/>
   <p:notesStyle>
-    <a:lvl1pPr marL="0" algn="l" defTabSz="457200" rtl="0" eaLnBrk="1" latinLnBrk="0" hangingPunct="1">
+    <a:lvl1pPr marL="0" algn="l" defTabSz="914400" rtl="0" eaLnBrk="1" latinLnBrk="0" hangingPunct="1">
       <a:defRPr sz="1200" kern="1200">
         <a:solidFill>
           <a:schemeClr val="tx1"/>
@@ -927,7 +860,7 @@
         <a:cs typeface="+mn-cs"/>
       </a:defRPr>
     </a:lvl1pPr>
-    <a:lvl2pPr marL="457200" algn="l" defTabSz="457200" rtl="0" eaLnBrk="1" latinLnBrk="0" hangingPunct="1">
+    <a:lvl2pPr marL="457200" algn="l" defTabSz="914400" rtl="0" eaLnBrk="1" latinLnBrk="0" hangingPunct="1">
       <a:defRPr sz="1200" kern="1200">
         <a:solidFill>
           <a:schemeClr val="tx1"/>
@@ -937,7 +870,7 @@
         <a:cs typeface="+mn-cs"/>
       </a:defRPr>
     </a:lvl2pPr>
-    <a:lvl3pPr marL="914400" algn="l" defTabSz="457200" rtl="0" eaLnBrk="1" latinLnBrk="0" hangingPunct="1">
+    <a:lvl3pPr marL="914400" algn="l" defTabSz="914400" rtl="0" eaLnBrk="1" latinLnBrk="0" hangingPunct="1">
       <a:defRPr sz="1200" kern="1200">
         <a:solidFill>
           <a:schemeClr val="tx1"/>
@@ -947,7 +880,7 @@
         <a:cs typeface="+mn-cs"/>
       </a:defRPr>
     </a:lvl3pPr>
-    <a:lvl4pPr marL="1371600" algn="l" defTabSz="457200" rtl="0" eaLnBrk="1" latinLnBrk="0" hangingPunct="1">
+    <a:lvl4pPr marL="1371600" algn="l" defTabSz="914400" rtl="0" eaLnBrk="1" latinLnBrk="0" hangingPunct="1">
       <a:defRPr sz="1200" kern="1200">
         <a:solidFill>
           <a:schemeClr val="tx1"/>
@@ -957,7 +890,7 @@
         <a:cs typeface="+mn-cs"/>
       </a:defRPr>
     </a:lvl4pPr>
-    <a:lvl5pPr marL="1828800" algn="l" defTabSz="457200" rtl="0" eaLnBrk="1" latinLnBrk="0" hangingPunct="1">
+    <a:lvl5pPr marL="1828800" algn="l" defTabSz="914400" rtl="0" eaLnBrk="1" latinLnBrk="0" hangingPunct="1">
       <a:defRPr sz="1200" kern="1200">
         <a:solidFill>
           <a:schemeClr val="tx1"/>
@@ -967,7 +900,7 @@
         <a:cs typeface="+mn-cs"/>
       </a:defRPr>
     </a:lvl5pPr>
-    <a:lvl6pPr marL="2286000" algn="l" defTabSz="457200" rtl="0" eaLnBrk="1" latinLnBrk="0" hangingPunct="1">
+    <a:lvl6pPr marL="2286000" algn="l" defTabSz="914400" rtl="0" eaLnBrk="1" latinLnBrk="0" hangingPunct="1">
       <a:defRPr sz="1200" kern="1200">
         <a:solidFill>
           <a:schemeClr val="tx1"/>
@@ -977,7 +910,7 @@
         <a:cs typeface="+mn-cs"/>
       </a:defRPr>
     </a:lvl6pPr>
-    <a:lvl7pPr marL="2743200" algn="l" defTabSz="457200" rtl="0" eaLnBrk="1" latinLnBrk="0" hangingPunct="1">
+    <a:lvl7pPr marL="2743200" algn="l" defTabSz="914400" rtl="0" eaLnBrk="1" latinLnBrk="0" hangingPunct="1">
       <a:defRPr sz="1200" kern="1200">
         <a:solidFill>
           <a:schemeClr val="tx1"/>
@@ -987,7 +920,7 @@
         <a:cs typeface="+mn-cs"/>
       </a:defRPr>
     </a:lvl7pPr>
-    <a:lvl8pPr marL="3200400" algn="l" defTabSz="457200" rtl="0" eaLnBrk="1" latinLnBrk="0" hangingPunct="1">
+    <a:lvl8pPr marL="3200400" algn="l" defTabSz="914400" rtl="0" eaLnBrk="1" latinLnBrk="0" hangingPunct="1">
       <a:defRPr sz="1200" kern="1200">
         <a:solidFill>
           <a:schemeClr val="tx1"/>
@@ -997,7 +930,7 @@
         <a:cs typeface="+mn-cs"/>
       </a:defRPr>
     </a:lvl8pPr>
-    <a:lvl9pPr marL="3657600" algn="l" defTabSz="457200" rtl="0" eaLnBrk="1" latinLnBrk="0" hangingPunct="1">
+    <a:lvl9pPr marL="3657600" algn="l" defTabSz="914400" rtl="0" eaLnBrk="1" latinLnBrk="0" hangingPunct="1">
       <a:defRPr sz="1200" kern="1200">
         <a:solidFill>
           <a:schemeClr val="tx1"/>
@@ -1012,7 +945,7 @@
 </file>
 
 <file path=ppt/notesSlides/notesSlide1.xml><?xml version="1.0" encoding="utf-8"?>
-<p:notes xmlns:a="http://schemas.openxmlformats.org/drawingml/2006/main" xmlns:p="http://schemas.openxmlformats.org/presentationml/2006/main" xmlns:r="http://schemas.openxmlformats.org/officeDocument/2006/relationships">
+<p:notes xmlns:a="http://schemas.openxmlformats.org/drawingml/2006/main" xmlns:r="http://schemas.openxmlformats.org/officeDocument/2006/relationships" xmlns:p="http://schemas.openxmlformats.org/presentationml/2006/main">
   <p:cSld>
     <p:spTree>
       <p:nvGrpSpPr>
@@ -1032,7 +965,7 @@
         <p:nvSpPr>
           <p:cNvPr id="2" name="Slide Image Placeholder 1"/>
           <p:cNvSpPr>
-            <a:spLocks noGrp="1"/>
+            <a:spLocks noGrp="1" noRot="1" noChangeAspect="1"/>
           </p:cNvSpPr>
           <p:nvPr>
             <p:ph type="sldImg" idx="2"/>
@@ -1047,7 +980,7 @@
             <a:spLocks noGrp="1"/>
           </p:cNvSpPr>
           <p:nvPr>
-            <p:ph type="body" idx="3" sz="quarter"/>
+            <p:ph type="body" sz="quarter" idx="3"/>
           </p:nvPr>
         </p:nvSpPr>
         <p:spPr/>
@@ -1068,7 +1001,7 @@
             <a:spLocks noGrp="1"/>
           </p:cNvSpPr>
           <p:nvPr>
-            <p:ph type="sldNum" idx="5" sz="quarter"/>
+            <p:ph type="sldNum" sz="quarter" idx="5"/>
           </p:nvPr>
         </p:nvSpPr>
         <p:spPr/>
@@ -1082,7 +1015,7 @@
 </file>
 
 <file path=ppt/notesSlides/notesSlide10.xml><?xml version="1.0" encoding="utf-8"?>
-<p:notes xmlns:a="http://schemas.openxmlformats.org/drawingml/2006/main" xmlns:p="http://schemas.openxmlformats.org/presentationml/2006/main" xmlns:r="http://schemas.openxmlformats.org/officeDocument/2006/relationships">
+<p:notes xmlns:a="http://schemas.openxmlformats.org/drawingml/2006/main" xmlns:r="http://schemas.openxmlformats.org/officeDocument/2006/relationships" xmlns:p="http://schemas.openxmlformats.org/presentationml/2006/main">
   <p:cSld>
     <p:spTree>
       <p:nvGrpSpPr>
@@ -1102,7 +1035,7 @@
         <p:nvSpPr>
           <p:cNvPr id="2" name="Slide Image Placeholder 1"/>
           <p:cNvSpPr>
-            <a:spLocks noGrp="1"/>
+            <a:spLocks noGrp="1" noRot="1" noChangeAspect="1"/>
           </p:cNvSpPr>
           <p:nvPr>
             <p:ph type="sldImg" idx="2"/>
@@ -1117,7 +1050,7 @@
             <a:spLocks noGrp="1"/>
           </p:cNvSpPr>
           <p:nvPr>
-            <p:ph type="body" idx="3" sz="quarter"/>
+            <p:ph type="body" sz="quarter" idx="3"/>
           </p:nvPr>
         </p:nvSpPr>
         <p:spPr/>
@@ -1138,7 +1071,7 @@
             <a:spLocks noGrp="1"/>
           </p:cNvSpPr>
           <p:nvPr>
-            <p:ph type="sldNum" idx="5" sz="quarter"/>
+            <p:ph type="sldNum" sz="quarter" idx="5"/>
           </p:nvPr>
         </p:nvSpPr>
         <p:spPr/>
@@ -1152,7 +1085,7 @@
 </file>
 
 <file path=ppt/notesSlides/notesSlide2.xml><?xml version="1.0" encoding="utf-8"?>
-<p:notes xmlns:a="http://schemas.openxmlformats.org/drawingml/2006/main" xmlns:p="http://schemas.openxmlformats.org/presentationml/2006/main" xmlns:r="http://schemas.openxmlformats.org/officeDocument/2006/relationships">
+<p:notes xmlns:a="http://schemas.openxmlformats.org/drawingml/2006/main" xmlns:r="http://schemas.openxmlformats.org/officeDocument/2006/relationships" xmlns:p="http://schemas.openxmlformats.org/presentationml/2006/main">
   <p:cSld>
     <p:spTree>
       <p:nvGrpSpPr>
@@ -1172,7 +1105,7 @@
         <p:nvSpPr>
           <p:cNvPr id="2" name="Slide Image Placeholder 1"/>
           <p:cNvSpPr>
-            <a:spLocks noGrp="1"/>
+            <a:spLocks noGrp="1" noRot="1" noChangeAspect="1"/>
           </p:cNvSpPr>
           <p:nvPr>
             <p:ph type="sldImg" idx="2"/>
@@ -1187,7 +1120,7 @@
             <a:spLocks noGrp="1"/>
           </p:cNvSpPr>
           <p:nvPr>
-            <p:ph type="body" idx="3" sz="quarter"/>
+            <p:ph type="body" sz="quarter" idx="3"/>
           </p:nvPr>
         </p:nvSpPr>
         <p:spPr/>
@@ -1208,7 +1141,7 @@
             <a:spLocks noGrp="1"/>
           </p:cNvSpPr>
           <p:nvPr>
-            <p:ph type="sldNum" idx="5" sz="quarter"/>
+            <p:ph type="sldNum" sz="quarter" idx="5"/>
           </p:nvPr>
         </p:nvSpPr>
         <p:spPr/>
@@ -1222,7 +1155,7 @@
 </file>
 
 <file path=ppt/notesSlides/notesSlide3.xml><?xml version="1.0" encoding="utf-8"?>
-<p:notes xmlns:a="http://schemas.openxmlformats.org/drawingml/2006/main" xmlns:p="http://schemas.openxmlformats.org/presentationml/2006/main" xmlns:r="http://schemas.openxmlformats.org/officeDocument/2006/relationships">
+<p:notes xmlns:a="http://schemas.openxmlformats.org/drawingml/2006/main" xmlns:r="http://schemas.openxmlformats.org/officeDocument/2006/relationships" xmlns:p="http://schemas.openxmlformats.org/presentationml/2006/main">
   <p:cSld>
     <p:spTree>
       <p:nvGrpSpPr>
@@ -1242,7 +1175,7 @@
         <p:nvSpPr>
           <p:cNvPr id="2" name="Slide Image Placeholder 1"/>
           <p:cNvSpPr>
-            <a:spLocks noGrp="1"/>
+            <a:spLocks noGrp="1" noRot="1" noChangeAspect="1"/>
           </p:cNvSpPr>
           <p:nvPr>
             <p:ph type="sldImg" idx="2"/>
@@ -1257,7 +1190,7 @@
             <a:spLocks noGrp="1"/>
           </p:cNvSpPr>
           <p:nvPr>
-            <p:ph type="body" idx="3" sz="quarter"/>
+            <p:ph type="body" sz="quarter" idx="3"/>
           </p:nvPr>
         </p:nvSpPr>
         <p:spPr/>
@@ -1278,7 +1211,7 @@
             <a:spLocks noGrp="1"/>
           </p:cNvSpPr>
           <p:nvPr>
-            <p:ph type="sldNum" idx="5" sz="quarter"/>
+            <p:ph type="sldNum" sz="quarter" idx="5"/>
           </p:nvPr>
         </p:nvSpPr>
         <p:spPr/>
@@ -1292,7 +1225,7 @@
 </file>
 
 <file path=ppt/notesSlides/notesSlide4.xml><?xml version="1.0" encoding="utf-8"?>
-<p:notes xmlns:a="http://schemas.openxmlformats.org/drawingml/2006/main" xmlns:p="http://schemas.openxmlformats.org/presentationml/2006/main" xmlns:r="http://schemas.openxmlformats.org/officeDocument/2006/relationships">
+<p:notes xmlns:a="http://schemas.openxmlformats.org/drawingml/2006/main" xmlns:r="http://schemas.openxmlformats.org/officeDocument/2006/relationships" xmlns:p="http://schemas.openxmlformats.org/presentationml/2006/main">
   <p:cSld>
     <p:spTree>
       <p:nvGrpSpPr>
@@ -1312,7 +1245,7 @@
         <p:nvSpPr>
           <p:cNvPr id="2" name="Slide Image Placeholder 1"/>
           <p:cNvSpPr>
-            <a:spLocks noGrp="1"/>
+            <a:spLocks noGrp="1" noRot="1" noChangeAspect="1"/>
           </p:cNvSpPr>
           <p:nvPr>
             <p:ph type="sldImg" idx="2"/>
@@ -1327,7 +1260,7 @@
             <a:spLocks noGrp="1"/>
           </p:cNvSpPr>
           <p:nvPr>
-            <p:ph type="body" idx="3" sz="quarter"/>
+            <p:ph type="body" sz="quarter" idx="3"/>
           </p:nvPr>
         </p:nvSpPr>
         <p:spPr/>
@@ -1348,7 +1281,7 @@
             <a:spLocks noGrp="1"/>
           </p:cNvSpPr>
           <p:nvPr>
-            <p:ph type="sldNum" idx="5" sz="quarter"/>
+            <p:ph type="sldNum" sz="quarter" idx="5"/>
           </p:nvPr>
         </p:nvSpPr>
         <p:spPr/>
@@ -1362,7 +1295,7 @@
 </file>
 
 <file path=ppt/notesSlides/notesSlide5.xml><?xml version="1.0" encoding="utf-8"?>
-<p:notes xmlns:a="http://schemas.openxmlformats.org/drawingml/2006/main" xmlns:p="http://schemas.openxmlformats.org/presentationml/2006/main" xmlns:r="http://schemas.openxmlformats.org/officeDocument/2006/relationships">
+<p:notes xmlns:a="http://schemas.openxmlformats.org/drawingml/2006/main" xmlns:r="http://schemas.openxmlformats.org/officeDocument/2006/relationships" xmlns:p="http://schemas.openxmlformats.org/presentationml/2006/main">
   <p:cSld>
     <p:spTree>
       <p:nvGrpSpPr>
@@ -1382,7 +1315,7 @@
         <p:nvSpPr>
           <p:cNvPr id="2" name="Slide Image Placeholder 1"/>
           <p:cNvSpPr>
-            <a:spLocks noGrp="1"/>
+            <a:spLocks noGrp="1" noRot="1" noChangeAspect="1"/>
           </p:cNvSpPr>
           <p:nvPr>
             <p:ph type="sldImg" idx="2"/>
@@ -1397,7 +1330,7 @@
             <a:spLocks noGrp="1"/>
           </p:cNvSpPr>
           <p:nvPr>
-            <p:ph type="body" idx="3" sz="quarter"/>
+            <p:ph type="body" sz="quarter" idx="3"/>
           </p:nvPr>
         </p:nvSpPr>
         <p:spPr/>
@@ -1418,7 +1351,7 @@
             <a:spLocks noGrp="1"/>
           </p:cNvSpPr>
           <p:nvPr>
-            <p:ph type="sldNum" idx="5" sz="quarter"/>
+            <p:ph type="sldNum" sz="quarter" idx="5"/>
           </p:nvPr>
         </p:nvSpPr>
         <p:spPr/>
@@ -1432,7 +1365,7 @@
 </file>
 
 <file path=ppt/notesSlides/notesSlide6.xml><?xml version="1.0" encoding="utf-8"?>
-<p:notes xmlns:a="http://schemas.openxmlformats.org/drawingml/2006/main" xmlns:p="http://schemas.openxmlformats.org/presentationml/2006/main" xmlns:r="http://schemas.openxmlformats.org/officeDocument/2006/relationships">
+<p:notes xmlns:a="http://schemas.openxmlformats.org/drawingml/2006/main" xmlns:r="http://schemas.openxmlformats.org/officeDocument/2006/relationships" xmlns:p="http://schemas.openxmlformats.org/presentationml/2006/main">
   <p:cSld>
     <p:spTree>
       <p:nvGrpSpPr>
@@ -1452,7 +1385,7 @@
         <p:nvSpPr>
           <p:cNvPr id="2" name="Slide Image Placeholder 1"/>
           <p:cNvSpPr>
-            <a:spLocks noGrp="1"/>
+            <a:spLocks noGrp="1" noRot="1" noChangeAspect="1"/>
           </p:cNvSpPr>
           <p:nvPr>
             <p:ph type="sldImg" idx="2"/>
@@ -1467,7 +1400,7 @@
             <a:spLocks noGrp="1"/>
           </p:cNvSpPr>
           <p:nvPr>
-            <p:ph type="body" idx="3" sz="quarter"/>
+            <p:ph type="body" sz="quarter" idx="3"/>
           </p:nvPr>
         </p:nvSpPr>
         <p:spPr/>
@@ -1488,7 +1421,7 @@
             <a:spLocks noGrp="1"/>
           </p:cNvSpPr>
           <p:nvPr>
-            <p:ph type="sldNum" idx="5" sz="quarter"/>
+            <p:ph type="sldNum" sz="quarter" idx="5"/>
           </p:nvPr>
         </p:nvSpPr>
         <p:spPr/>
@@ -1502,7 +1435,7 @@
 </file>
 
 <file path=ppt/notesSlides/notesSlide7.xml><?xml version="1.0" encoding="utf-8"?>
-<p:notes xmlns:a="http://schemas.openxmlformats.org/drawingml/2006/main" xmlns:p="http://schemas.openxmlformats.org/presentationml/2006/main" xmlns:r="http://schemas.openxmlformats.org/officeDocument/2006/relationships">
+<p:notes xmlns:a="http://schemas.openxmlformats.org/drawingml/2006/main" xmlns:r="http://schemas.openxmlformats.org/officeDocument/2006/relationships" xmlns:p="http://schemas.openxmlformats.org/presentationml/2006/main">
   <p:cSld>
     <p:spTree>
       <p:nvGrpSpPr>
@@ -1522,7 +1455,7 @@
         <p:nvSpPr>
           <p:cNvPr id="2" name="Slide Image Placeholder 1"/>
           <p:cNvSpPr>
-            <a:spLocks noGrp="1"/>
+            <a:spLocks noGrp="1" noRot="1" noChangeAspect="1"/>
           </p:cNvSpPr>
           <p:nvPr>
             <p:ph type="sldImg" idx="2"/>
@@ -1537,7 +1470,7 @@
             <a:spLocks noGrp="1"/>
           </p:cNvSpPr>
           <p:nvPr>
-            <p:ph type="body" idx="3" sz="quarter"/>
+            <p:ph type="body" sz="quarter" idx="3"/>
           </p:nvPr>
         </p:nvSpPr>
         <p:spPr/>
@@ -1558,7 +1491,7 @@
             <a:spLocks noGrp="1"/>
           </p:cNvSpPr>
           <p:nvPr>
-            <p:ph type="sldNum" idx="5" sz="quarter"/>
+            <p:ph type="sldNum" sz="quarter" idx="5"/>
           </p:nvPr>
         </p:nvSpPr>
         <p:spPr/>
@@ -1572,7 +1505,7 @@
 </file>
 
 <file path=ppt/notesSlides/notesSlide8.xml><?xml version="1.0" encoding="utf-8"?>
-<p:notes xmlns:a="http://schemas.openxmlformats.org/drawingml/2006/main" xmlns:p="http://schemas.openxmlformats.org/presentationml/2006/main" xmlns:r="http://schemas.openxmlformats.org/officeDocument/2006/relationships">
+<p:notes xmlns:a="http://schemas.openxmlformats.org/drawingml/2006/main" xmlns:r="http://schemas.openxmlformats.org/officeDocument/2006/relationships" xmlns:p="http://schemas.openxmlformats.org/presentationml/2006/main">
   <p:cSld>
     <p:spTree>
       <p:nvGrpSpPr>
@@ -1592,7 +1525,7 @@
         <p:nvSpPr>
           <p:cNvPr id="2" name="Slide Image Placeholder 1"/>
           <p:cNvSpPr>
-            <a:spLocks noGrp="1"/>
+            <a:spLocks noGrp="1" noRot="1" noChangeAspect="1"/>
           </p:cNvSpPr>
           <p:nvPr>
             <p:ph type="sldImg" idx="2"/>
@@ -1607,7 +1540,7 @@
             <a:spLocks noGrp="1"/>
           </p:cNvSpPr>
           <p:nvPr>
-            <p:ph type="body" idx="3" sz="quarter"/>
+            <p:ph type="body" sz="quarter" idx="3"/>
           </p:nvPr>
         </p:nvSpPr>
         <p:spPr/>
@@ -1628,7 +1561,7 @@
             <a:spLocks noGrp="1"/>
           </p:cNvSpPr>
           <p:nvPr>
-            <p:ph type="sldNum" idx="5" sz="quarter"/>
+            <p:ph type="sldNum" sz="quarter" idx="5"/>
           </p:nvPr>
         </p:nvSpPr>
         <p:spPr/>
@@ -1642,7 +1575,7 @@
 </file>
 
 <file path=ppt/notesSlides/notesSlide9.xml><?xml version="1.0" encoding="utf-8"?>
-<p:notes xmlns:a="http://schemas.openxmlformats.org/drawingml/2006/main" xmlns:p="http://schemas.openxmlformats.org/presentationml/2006/main" xmlns:r="http://schemas.openxmlformats.org/officeDocument/2006/relationships">
+<p:notes xmlns:a="http://schemas.openxmlformats.org/drawingml/2006/main" xmlns:r="http://schemas.openxmlformats.org/officeDocument/2006/relationships" xmlns:p="http://schemas.openxmlformats.org/presentationml/2006/main">
   <p:cSld>
     <p:spTree>
       <p:nvGrpSpPr>
@@ -1662,7 +1595,7 @@
         <p:nvSpPr>
           <p:cNvPr id="2" name="Slide Image Placeholder 1"/>
           <p:cNvSpPr>
-            <a:spLocks noGrp="1"/>
+            <a:spLocks noGrp="1" noRot="1" noChangeAspect="1"/>
           </p:cNvSpPr>
           <p:nvPr>
             <p:ph type="sldImg" idx="2"/>
@@ -1677,7 +1610,7 @@
             <a:spLocks noGrp="1"/>
           </p:cNvSpPr>
           <p:nvPr>
-            <p:ph type="body" idx="3" sz="quarter"/>
+            <p:ph type="body" sz="quarter" idx="3"/>
           </p:nvPr>
         </p:nvSpPr>
         <p:spPr/>
@@ -1698,7 +1631,7 @@
             <a:spLocks noGrp="1"/>
           </p:cNvSpPr>
           <p:nvPr>
-            <p:ph type="sldNum" idx="5" sz="quarter"/>
+            <p:ph type="sldNum" sz="quarter" idx="5"/>
           </p:nvPr>
         </p:nvSpPr>
         <p:spPr/>
@@ -1749,10 +1682,9 @@
           <a:lstStyle/>
           <a:p>
             <a:r>
-              <a:rPr lang="en-US" smtClean="0"/>
+              <a:rPr lang="en-US"/>
               <a:t>Click to edit Master title style</a:t>
             </a:r>
-            <a:endParaRPr lang="en-US"/>
           </a:p>
         </p:txBody>
       </p:sp>
@@ -1868,10 +1800,9 @@
           </a:lstStyle>
           <a:p>
             <a:r>
-              <a:rPr lang="en-US" smtClean="0"/>
+              <a:rPr lang="en-US"/>
               <a:t>Click to edit Master subtitle style</a:t>
             </a:r>
-            <a:endParaRPr lang="en-US"/>
           </a:p>
         </p:txBody>
       </p:sp>
@@ -1892,7 +1823,7 @@
           <a:p>
             <a:fld id="{5BCAD085-E8A6-8845-BD4E-CB4CCA059FC4}" type="datetimeFigureOut">
               <a:rPr lang="en-US" smtClean="0"/>
-              <a:t>1/27/13</a:t>
+              <a:t>9/16/2026</a:t>
             </a:fld>
             <a:endParaRPr lang="en-US"/>
           </a:p>
@@ -1986,10 +1917,9 @@
           <a:lstStyle/>
           <a:p>
             <a:r>
-              <a:rPr lang="en-US" smtClean="0"/>
+              <a:rPr lang="en-US"/>
               <a:t>Click to edit Master title style</a:t>
             </a:r>
-            <a:endParaRPr lang="en-US"/>
           </a:p>
         </p:txBody>
       </p:sp>
@@ -2010,38 +1940,37 @@
           <a:p>
             <a:pPr lvl="0"/>
             <a:r>
-              <a:rPr lang="en-US" smtClean="0"/>
+              <a:rPr lang="en-US"/>
               <a:t>Click to edit Master text styles</a:t>
             </a:r>
           </a:p>
           <a:p>
             <a:pPr lvl="1"/>
             <a:r>
-              <a:rPr lang="en-US" smtClean="0"/>
+              <a:rPr lang="en-US"/>
               <a:t>Second level</a:t>
             </a:r>
           </a:p>
           <a:p>
             <a:pPr lvl="2"/>
             <a:r>
-              <a:rPr lang="en-US" smtClean="0"/>
+              <a:rPr lang="en-US"/>
               <a:t>Third level</a:t>
             </a:r>
           </a:p>
           <a:p>
             <a:pPr lvl="3"/>
             <a:r>
-              <a:rPr lang="en-US" smtClean="0"/>
+              <a:rPr lang="en-US"/>
               <a:t>Fourth level</a:t>
             </a:r>
           </a:p>
           <a:p>
             <a:pPr lvl="4"/>
             <a:r>
-              <a:rPr lang="en-US" smtClean="0"/>
+              <a:rPr lang="en-US"/>
               <a:t>Fifth level</a:t>
             </a:r>
-            <a:endParaRPr lang="en-US"/>
           </a:p>
         </p:txBody>
       </p:sp>
@@ -2062,7 +1991,7 @@
           <a:p>
             <a:fld id="{5BCAD085-E8A6-8845-BD4E-CB4CCA059FC4}" type="datetimeFigureOut">
               <a:rPr lang="en-US" smtClean="0"/>
-              <a:t>1/27/13</a:t>
+              <a:t>9/16/2026</a:t>
             </a:fld>
             <a:endParaRPr lang="en-US"/>
           </a:p>
@@ -2161,10 +2090,9 @@
           <a:lstStyle/>
           <a:p>
             <a:r>
-              <a:rPr lang="en-US" smtClean="0"/>
+              <a:rPr lang="en-US"/>
               <a:t>Click to edit Master title style</a:t>
             </a:r>
-            <a:endParaRPr lang="en-US"/>
           </a:p>
         </p:txBody>
       </p:sp>
@@ -2190,38 +2118,37 @@
           <a:p>
             <a:pPr lvl="0"/>
             <a:r>
-              <a:rPr lang="en-US" smtClean="0"/>
+              <a:rPr lang="en-US"/>
               <a:t>Click to edit Master text styles</a:t>
             </a:r>
           </a:p>
           <a:p>
             <a:pPr lvl="1"/>
             <a:r>
-              <a:rPr lang="en-US" smtClean="0"/>
+              <a:rPr lang="en-US"/>
               <a:t>Second level</a:t>
             </a:r>
           </a:p>
           <a:p>
             <a:pPr lvl="2"/>
             <a:r>
-              <a:rPr lang="en-US" smtClean="0"/>
+              <a:rPr lang="en-US"/>
               <a:t>Third level</a:t>
             </a:r>
           </a:p>
           <a:p>
             <a:pPr lvl="3"/>
             <a:r>
-              <a:rPr lang="en-US" smtClean="0"/>
+              <a:rPr lang="en-US"/>
               <a:t>Fourth level</a:t>
             </a:r>
           </a:p>
           <a:p>
             <a:pPr lvl="4"/>
             <a:r>
-              <a:rPr lang="en-US" smtClean="0"/>
+              <a:rPr lang="en-US"/>
               <a:t>Fifth level</a:t>
             </a:r>
-            <a:endParaRPr lang="en-US"/>
           </a:p>
         </p:txBody>
       </p:sp>
@@ -2242,7 +2169,7 @@
           <a:p>
             <a:fld id="{5BCAD085-E8A6-8845-BD4E-CB4CCA059FC4}" type="datetimeFigureOut">
               <a:rPr lang="en-US" smtClean="0"/>
-              <a:t>1/27/13</a:t>
+              <a:t>9/16/2026</a:t>
             </a:fld>
             <a:endParaRPr lang="en-US"/>
           </a:p>
@@ -2336,10 +2263,9 @@
           <a:lstStyle/>
           <a:p>
             <a:r>
-              <a:rPr lang="en-US" smtClean="0"/>
+              <a:rPr lang="en-US"/>
               <a:t>Click to edit Master title style</a:t>
             </a:r>
-            <a:endParaRPr lang="en-US"/>
           </a:p>
         </p:txBody>
       </p:sp>
@@ -2360,38 +2286,37 @@
           <a:p>
             <a:pPr lvl="0"/>
             <a:r>
-              <a:rPr lang="en-US" smtClean="0"/>
+              <a:rPr lang="en-US"/>
               <a:t>Click to edit Master text styles</a:t>
             </a:r>
           </a:p>
           <a:p>
             <a:pPr lvl="1"/>
             <a:r>
-              <a:rPr lang="en-US" smtClean="0"/>
+              <a:rPr lang="en-US"/>
               <a:t>Second level</a:t>
             </a:r>
           </a:p>
           <a:p>
             <a:pPr lvl="2"/>
             <a:r>
-              <a:rPr lang="en-US" smtClean="0"/>
+              <a:rPr lang="en-US"/>
               <a:t>Third level</a:t>
             </a:r>
           </a:p>
           <a:p>
             <a:pPr lvl="3"/>
             <a:r>
-              <a:rPr lang="en-US" smtClean="0"/>
+              <a:rPr lang="en-US"/>
               <a:t>Fourth level</a:t>
             </a:r>
           </a:p>
           <a:p>
             <a:pPr lvl="4"/>
             <a:r>
-              <a:rPr lang="en-US" smtClean="0"/>
+              <a:rPr lang="en-US"/>
               <a:t>Fifth level</a:t>
             </a:r>
-            <a:endParaRPr lang="en-US"/>
           </a:p>
         </p:txBody>
       </p:sp>
@@ -2412,7 +2337,7 @@
           <a:p>
             <a:fld id="{5BCAD085-E8A6-8845-BD4E-CB4CCA059FC4}" type="datetimeFigureOut">
               <a:rPr lang="en-US" smtClean="0"/>
-              <a:t>1/27/13</a:t>
+              <a:t>9/16/2026</a:t>
             </a:fld>
             <a:endParaRPr lang="en-US"/>
           </a:p>
@@ -2515,10 +2440,9 @@
           </a:lstStyle>
           <a:p>
             <a:r>
-              <a:rPr lang="en-US" smtClean="0"/>
+              <a:rPr lang="en-US"/>
               <a:t>Click to edit Master title style</a:t>
             </a:r>
-            <a:endParaRPr lang="en-US"/>
           </a:p>
         </p:txBody>
       </p:sp>
@@ -2635,7 +2559,7 @@
           <a:p>
             <a:pPr lvl="0"/>
             <a:r>
-              <a:rPr lang="en-US" smtClean="0"/>
+              <a:rPr lang="en-US"/>
               <a:t>Click to edit Master text styles</a:t>
             </a:r>
           </a:p>
@@ -2658,7 +2582,7 @@
           <a:p>
             <a:fld id="{5BCAD085-E8A6-8845-BD4E-CB4CCA059FC4}" type="datetimeFigureOut">
               <a:rPr lang="en-US" smtClean="0"/>
-              <a:t>1/27/13</a:t>
+              <a:t>9/16/2026</a:t>
             </a:fld>
             <a:endParaRPr lang="en-US"/>
           </a:p>
@@ -2752,10 +2676,9 @@
           <a:lstStyle/>
           <a:p>
             <a:r>
-              <a:rPr lang="en-US" smtClean="0"/>
+              <a:rPr lang="en-US"/>
               <a:t>Click to edit Master title style</a:t>
             </a:r>
-            <a:endParaRPr lang="en-US"/>
           </a:p>
         </p:txBody>
       </p:sp>
@@ -2809,38 +2732,37 @@
           <a:p>
             <a:pPr lvl="0"/>
             <a:r>
-              <a:rPr lang="en-US" smtClean="0"/>
+              <a:rPr lang="en-US"/>
               <a:t>Click to edit Master text styles</a:t>
             </a:r>
           </a:p>
           <a:p>
             <a:pPr lvl="1"/>
             <a:r>
-              <a:rPr lang="en-US" smtClean="0"/>
+              <a:rPr lang="en-US"/>
               <a:t>Second level</a:t>
             </a:r>
           </a:p>
           <a:p>
             <a:pPr lvl="2"/>
             <a:r>
-              <a:rPr lang="en-US" smtClean="0"/>
+              <a:rPr lang="en-US"/>
               <a:t>Third level</a:t>
             </a:r>
           </a:p>
           <a:p>
             <a:pPr lvl="3"/>
             <a:r>
-              <a:rPr lang="en-US" smtClean="0"/>
+              <a:rPr lang="en-US"/>
               <a:t>Fourth level</a:t>
             </a:r>
           </a:p>
           <a:p>
             <a:pPr lvl="4"/>
             <a:r>
-              <a:rPr lang="en-US" smtClean="0"/>
+              <a:rPr lang="en-US"/>
               <a:t>Fifth level</a:t>
             </a:r>
-            <a:endParaRPr lang="en-US"/>
           </a:p>
         </p:txBody>
       </p:sp>
@@ -2894,38 +2816,37 @@
           <a:p>
             <a:pPr lvl="0"/>
             <a:r>
-              <a:rPr lang="en-US" smtClean="0"/>
+              <a:rPr lang="en-US"/>
               <a:t>Click to edit Master text styles</a:t>
             </a:r>
           </a:p>
           <a:p>
             <a:pPr lvl="1"/>
             <a:r>
-              <a:rPr lang="en-US" smtClean="0"/>
+              <a:rPr lang="en-US"/>
               <a:t>Second level</a:t>
             </a:r>
           </a:p>
           <a:p>
             <a:pPr lvl="2"/>
             <a:r>
-              <a:rPr lang="en-US" smtClean="0"/>
+              <a:rPr lang="en-US"/>
               <a:t>Third level</a:t>
             </a:r>
           </a:p>
           <a:p>
             <a:pPr lvl="3"/>
             <a:r>
-              <a:rPr lang="en-US" smtClean="0"/>
+              <a:rPr lang="en-US"/>
               <a:t>Fourth level</a:t>
             </a:r>
           </a:p>
           <a:p>
             <a:pPr lvl="4"/>
             <a:r>
-              <a:rPr lang="en-US" smtClean="0"/>
+              <a:rPr lang="en-US"/>
               <a:t>Fifth level</a:t>
             </a:r>
-            <a:endParaRPr lang="en-US"/>
           </a:p>
         </p:txBody>
       </p:sp>
@@ -2946,7 +2867,7 @@
           <a:p>
             <a:fld id="{5BCAD085-E8A6-8845-BD4E-CB4CCA059FC4}" type="datetimeFigureOut">
               <a:rPr lang="en-US" smtClean="0"/>
-              <a:t>1/27/13</a:t>
+              <a:t>9/16/2026</a:t>
             </a:fld>
             <a:endParaRPr lang="en-US"/>
           </a:p>
@@ -3044,10 +2965,9 @@
           </a:lstStyle>
           <a:p>
             <a:r>
-              <a:rPr lang="en-US" smtClean="0"/>
+              <a:rPr lang="en-US"/>
               <a:t>Click to edit Master title style</a:t>
             </a:r>
-            <a:endParaRPr lang="en-US"/>
           </a:p>
         </p:txBody>
       </p:sp>
@@ -3110,7 +3030,7 @@
           <a:p>
             <a:pPr lvl="0"/>
             <a:r>
-              <a:rPr lang="en-US" smtClean="0"/>
+              <a:rPr lang="en-US"/>
               <a:t>Click to edit Master text styles</a:t>
             </a:r>
           </a:p>
@@ -3166,38 +3086,37 @@
           <a:p>
             <a:pPr lvl="0"/>
             <a:r>
-              <a:rPr lang="en-US" smtClean="0"/>
+              <a:rPr lang="en-US"/>
               <a:t>Click to edit Master text styles</a:t>
             </a:r>
           </a:p>
           <a:p>
             <a:pPr lvl="1"/>
             <a:r>
-              <a:rPr lang="en-US" smtClean="0"/>
+              <a:rPr lang="en-US"/>
               <a:t>Second level</a:t>
             </a:r>
           </a:p>
           <a:p>
             <a:pPr lvl="2"/>
             <a:r>
-              <a:rPr lang="en-US" smtClean="0"/>
+              <a:rPr lang="en-US"/>
               <a:t>Third level</a:t>
             </a:r>
           </a:p>
           <a:p>
             <a:pPr lvl="3"/>
             <a:r>
-              <a:rPr lang="en-US" smtClean="0"/>
+              <a:rPr lang="en-US"/>
               <a:t>Fourth level</a:t>
             </a:r>
           </a:p>
           <a:p>
             <a:pPr lvl="4"/>
             <a:r>
-              <a:rPr lang="en-US" smtClean="0"/>
+              <a:rPr lang="en-US"/>
               <a:t>Fifth level</a:t>
             </a:r>
-            <a:endParaRPr lang="en-US"/>
           </a:p>
         </p:txBody>
       </p:sp>
@@ -3260,7 +3179,7 @@
           <a:p>
             <a:pPr lvl="0"/>
             <a:r>
-              <a:rPr lang="en-US" smtClean="0"/>
+              <a:rPr lang="en-US"/>
               <a:t>Click to edit Master text styles</a:t>
             </a:r>
           </a:p>
@@ -3316,38 +3235,37 @@
           <a:p>
             <a:pPr lvl="0"/>
             <a:r>
-              <a:rPr lang="en-US" smtClean="0"/>
+              <a:rPr lang="en-US"/>
               <a:t>Click to edit Master text styles</a:t>
             </a:r>
           </a:p>
           <a:p>
             <a:pPr lvl="1"/>
             <a:r>
-              <a:rPr lang="en-US" smtClean="0"/>
+              <a:rPr lang="en-US"/>
               <a:t>Second level</a:t>
             </a:r>
           </a:p>
           <a:p>
             <a:pPr lvl="2"/>
             <a:r>
-              <a:rPr lang="en-US" smtClean="0"/>
+              <a:rPr lang="en-US"/>
               <a:t>Third level</a:t>
             </a:r>
           </a:p>
           <a:p>
             <a:pPr lvl="3"/>
             <a:r>
-              <a:rPr lang="en-US" smtClean="0"/>
+              <a:rPr lang="en-US"/>
               <a:t>Fourth level</a:t>
             </a:r>
           </a:p>
           <a:p>
             <a:pPr lvl="4"/>
             <a:r>
-              <a:rPr lang="en-US" smtClean="0"/>
+              <a:rPr lang="en-US"/>
               <a:t>Fifth level</a:t>
             </a:r>
-            <a:endParaRPr lang="en-US"/>
           </a:p>
         </p:txBody>
       </p:sp>
@@ -3368,7 +3286,7 @@
           <a:p>
             <a:fld id="{5BCAD085-E8A6-8845-BD4E-CB4CCA059FC4}" type="datetimeFigureOut">
               <a:rPr lang="en-US" smtClean="0"/>
-              <a:t>1/27/13</a:t>
+              <a:t>9/16/2026</a:t>
             </a:fld>
             <a:endParaRPr lang="en-US"/>
           </a:p>
@@ -3462,10 +3380,9 @@
           <a:lstStyle/>
           <a:p>
             <a:r>
-              <a:rPr lang="en-US" smtClean="0"/>
+              <a:rPr lang="en-US"/>
               <a:t>Click to edit Master title style</a:t>
             </a:r>
-            <a:endParaRPr lang="en-US"/>
           </a:p>
         </p:txBody>
       </p:sp>
@@ -3486,7 +3403,7 @@
           <a:p>
             <a:fld id="{5BCAD085-E8A6-8845-BD4E-CB4CCA059FC4}" type="datetimeFigureOut">
               <a:rPr lang="en-US" smtClean="0"/>
-              <a:t>1/27/13</a:t>
+              <a:t>9/16/2026</a:t>
             </a:fld>
             <a:endParaRPr lang="en-US"/>
           </a:p>
@@ -3581,7 +3498,7 @@
           <a:p>
             <a:fld id="{5BCAD085-E8A6-8845-BD4E-CB4CCA059FC4}" type="datetimeFigureOut">
               <a:rPr lang="en-US" smtClean="0"/>
-              <a:t>1/27/13</a:t>
+              <a:t>9/16/2026</a:t>
             </a:fld>
             <a:endParaRPr lang="en-US"/>
           </a:p>
@@ -3684,10 +3601,9 @@
           </a:lstStyle>
           <a:p>
             <a:r>
-              <a:rPr lang="en-US" smtClean="0"/>
+              <a:rPr lang="en-US"/>
               <a:t>Click to edit Master title style</a:t>
             </a:r>
-            <a:endParaRPr lang="en-US"/>
           </a:p>
         </p:txBody>
       </p:sp>
@@ -3741,38 +3657,37 @@
           <a:p>
             <a:pPr lvl="0"/>
             <a:r>
-              <a:rPr lang="en-US" smtClean="0"/>
+              <a:rPr lang="en-US"/>
               <a:t>Click to edit Master text styles</a:t>
             </a:r>
           </a:p>
           <a:p>
             <a:pPr lvl="1"/>
             <a:r>
-              <a:rPr lang="en-US" smtClean="0"/>
+              <a:rPr lang="en-US"/>
               <a:t>Second level</a:t>
             </a:r>
           </a:p>
           <a:p>
             <a:pPr lvl="2"/>
             <a:r>
-              <a:rPr lang="en-US" smtClean="0"/>
+              <a:rPr lang="en-US"/>
               <a:t>Third level</a:t>
             </a:r>
           </a:p>
           <a:p>
             <a:pPr lvl="3"/>
             <a:r>
-              <a:rPr lang="en-US" smtClean="0"/>
+              <a:rPr lang="en-US"/>
               <a:t>Fourth level</a:t>
             </a:r>
           </a:p>
           <a:p>
             <a:pPr lvl="4"/>
             <a:r>
-              <a:rPr lang="en-US" smtClean="0"/>
+              <a:rPr lang="en-US"/>
               <a:t>Fifth level</a:t>
             </a:r>
-            <a:endParaRPr lang="en-US"/>
           </a:p>
         </p:txBody>
       </p:sp>
@@ -3835,7 +3750,7 @@
           <a:p>
             <a:pPr lvl="0"/>
             <a:r>
-              <a:rPr lang="en-US" smtClean="0"/>
+              <a:rPr lang="en-US"/>
               <a:t>Click to edit Master text styles</a:t>
             </a:r>
           </a:p>
@@ -3858,7 +3773,7 @@
           <a:p>
             <a:fld id="{5BCAD085-E8A6-8845-BD4E-CB4CCA059FC4}" type="datetimeFigureOut">
               <a:rPr lang="en-US" smtClean="0"/>
-              <a:t>1/27/13</a:t>
+              <a:t>9/16/2026</a:t>
             </a:fld>
             <a:endParaRPr lang="en-US"/>
           </a:p>
@@ -3961,10 +3876,9 @@
           </a:lstStyle>
           <a:p>
             <a:r>
-              <a:rPr lang="en-US" smtClean="0"/>
+              <a:rPr lang="en-US"/>
               <a:t>Click to edit Master title style</a:t>
             </a:r>
-            <a:endParaRPr lang="en-US"/>
           </a:p>
         </p:txBody>
       </p:sp>
@@ -4088,7 +4002,7 @@
           <a:p>
             <a:pPr lvl="0"/>
             <a:r>
-              <a:rPr lang="en-US" smtClean="0"/>
+              <a:rPr lang="en-US"/>
               <a:t>Click to edit Master text styles</a:t>
             </a:r>
           </a:p>
@@ -4111,7 +4025,7 @@
           <a:p>
             <a:fld id="{5BCAD085-E8A6-8845-BD4E-CB4CCA059FC4}" type="datetimeFigureOut">
               <a:rPr lang="en-US" smtClean="0"/>
-              <a:t>1/27/13</a:t>
+              <a:t>9/16/2026</a:t>
             </a:fld>
             <a:endParaRPr lang="en-US"/>
           </a:p>
@@ -4220,10 +4134,9 @@
           <a:lstStyle/>
           <a:p>
             <a:r>
-              <a:rPr lang="en-US" smtClean="0"/>
+              <a:rPr lang="en-US"/>
               <a:t>Click to edit Master title style</a:t>
             </a:r>
-            <a:endParaRPr lang="en-US"/>
           </a:p>
         </p:txBody>
       </p:sp>
@@ -4254,38 +4167,37 @@
           <a:p>
             <a:pPr lvl="0"/>
             <a:r>
-              <a:rPr lang="en-US" smtClean="0"/>
+              <a:rPr lang="en-US"/>
               <a:t>Click to edit Master text styles</a:t>
             </a:r>
           </a:p>
           <a:p>
             <a:pPr lvl="1"/>
             <a:r>
-              <a:rPr lang="en-US" smtClean="0"/>
+              <a:rPr lang="en-US"/>
               <a:t>Second level</a:t>
             </a:r>
           </a:p>
           <a:p>
             <a:pPr lvl="2"/>
             <a:r>
-              <a:rPr lang="en-US" smtClean="0"/>
+              <a:rPr lang="en-US"/>
               <a:t>Third level</a:t>
             </a:r>
           </a:p>
           <a:p>
             <a:pPr lvl="3"/>
             <a:r>
-              <a:rPr lang="en-US" smtClean="0"/>
+              <a:rPr lang="en-US"/>
               <a:t>Fourth level</a:t>
             </a:r>
           </a:p>
           <a:p>
             <a:pPr lvl="4"/>
             <a:r>
-              <a:rPr lang="en-US" smtClean="0"/>
+              <a:rPr lang="en-US"/>
               <a:t>Fifth level</a:t>
             </a:r>
-            <a:endParaRPr lang="en-US"/>
           </a:p>
         </p:txBody>
       </p:sp>
@@ -4324,7 +4236,7 @@
           <a:p>
             <a:fld id="{5BCAD085-E8A6-8845-BD4E-CB4CCA059FC4}" type="datetimeFigureOut">
               <a:rPr lang="en-US" smtClean="0"/>
-              <a:t>1/27/13</a:t>
+              <a:t>9/16/2026</a:t>
             </a:fld>
             <a:endParaRPr lang="en-US"/>
           </a:p>
@@ -4683,7 +4595,7 @@
 </file>
 
 <file path=ppt/slides/slide1.xml><?xml version="1.0" encoding="utf-8"?>
-<p:sld xmlns:a="http://schemas.openxmlformats.org/drawingml/2006/main" xmlns:p="http://schemas.openxmlformats.org/presentationml/2006/main" xmlns:r="http://schemas.openxmlformats.org/officeDocument/2006/relationships">
+<p:sld xmlns:a="http://schemas.openxmlformats.org/drawingml/2006/main" xmlns:r="http://schemas.openxmlformats.org/officeDocument/2006/relationships" xmlns:p="http://schemas.openxmlformats.org/presentationml/2006/main">
   <p:cSld>
     <p:spTree>
       <p:nvGrpSpPr>
@@ -4691,7 +4603,14 @@
         <p:cNvGrpSpPr/>
         <p:nvPr/>
       </p:nvGrpSpPr>
-      <p:grpSpPr/>
+      <p:grpSpPr>
+        <a:xfrm>
+          <a:off x="0" y="0"/>
+          <a:ext cx="0" cy="0"/>
+          <a:chOff x="0" y="0"/>
+          <a:chExt cx="0" cy="0"/>
+        </a:xfrm>
+      </p:grpSpPr>
       <p:sp>
         <p:nvSpPr>
           <p:cNvPr id="2" name="TextBox 1"/>
@@ -4709,7 +4628,7 @@
           <a:noFill/>
         </p:spPr>
         <p:txBody>
-          <a:bodyPr wrap="square" lIns="36576" rIns="36576" tIns="18288" bIns="18288" anchor="t">
+          <a:bodyPr wrap="square" lIns="36576" tIns="18288" rIns="36576" bIns="18288" anchor="t">
             <a:spAutoFit/>
           </a:bodyPr>
           <a:lstStyle/>
@@ -4751,7 +4670,7 @@
           <a:noFill/>
         </p:spPr>
         <p:txBody>
-          <a:bodyPr wrap="square" lIns="36576" rIns="36576" tIns="18288" bIns="18288" anchor="t">
+          <a:bodyPr wrap="square" lIns="36576" tIns="18288" rIns="36576" bIns="18288" anchor="t">
             <a:spAutoFit/>
           </a:bodyPr>
           <a:lstStyle/>
@@ -4793,7 +4712,7 @@
           <a:noFill/>
         </p:spPr>
         <p:txBody>
-          <a:bodyPr wrap="square" lIns="36576" rIns="36576" tIns="18288" bIns="18288" anchor="t">
+          <a:bodyPr wrap="square" lIns="36576" tIns="18288" rIns="36576" bIns="18288" anchor="t">
             <a:spAutoFit/>
           </a:bodyPr>
           <a:lstStyle/>
@@ -4835,7 +4754,7 @@
           <a:noFill/>
         </p:spPr>
         <p:txBody>
-          <a:bodyPr wrap="square" lIns="36576" rIns="36576" tIns="18288" bIns="18288" anchor="t">
+          <a:bodyPr wrap="square" lIns="36576" tIns="18288" rIns="36576" bIns="18288" anchor="t">
             <a:spAutoFit/>
           </a:bodyPr>
           <a:lstStyle/>
@@ -4849,437 +4768,13 @@
               </a:spcAft>
             </a:pPr>
             <a:r>
-              <a:rPr sz="2000" b="0">
+              <a:rPr sz="2000" b="0" dirty="0">
                 <a:solidFill>
                   <a:srgbClr val="6B7280"/>
                 </a:solidFill>
                 <a:latin typeface="Segoe UI"/>
               </a:rPr>
               <a:t>One connected, self-protecting database for gym operations</a:t>
-            </a:r>
-          </a:p>
-        </p:txBody>
-      </p:sp>
-      <p:sp>
-        <p:nvSpPr>
-          <p:cNvPr id="6" name="Rounded Rectangle 5"/>
-          <p:cNvSpPr/>
-          <p:nvPr/>
-        </p:nvSpPr>
-        <p:spPr>
-          <a:xfrm>
-            <a:off x="7635240" y="868680"/>
-            <a:ext cx="4023360" cy="4526280"/>
-          </a:xfrm>
-          <a:prstGeom prst="roundRect">
-            <a:avLst>
-              <a:gd name="adj" fmla="val 5000"/>
-            </a:avLst>
-          </a:prstGeom>
-          <a:solidFill>
-            <a:srgbClr val="F3F4F6"/>
-          </a:solidFill>
-          <a:ln>
-            <a:noFill/>
-          </a:ln>
-          <a:effectLst/>
-        </p:spPr>
-        <p:style>
-          <a:lnRef idx="1">
-            <a:schemeClr val="accent1"/>
-          </a:lnRef>
-          <a:fillRef idx="3">
-            <a:schemeClr val="accent1"/>
-          </a:fillRef>
-          <a:effectRef idx="2">
-            <a:schemeClr val="accent1"/>
-          </a:effectRef>
-          <a:fontRef idx="minor">
-            <a:schemeClr val="lt1"/>
-          </a:fontRef>
-        </p:style>
-        <p:txBody>
-          <a:bodyPr rtlCol="0" anchor="ctr"/>
-          <a:lstStyle/>
-          <a:p>
-            <a:pPr algn="ctr"/>
-          </a:p>
-        </p:txBody>
-      </p:sp>
-      <p:sp>
-        <p:nvSpPr>
-          <p:cNvPr id="7" name="TextBox 6"/>
-          <p:cNvSpPr txBox="1"/>
-          <p:nvPr/>
-        </p:nvSpPr>
-        <p:spPr>
-          <a:xfrm>
-            <a:off x="7955279" y="1097280"/>
-            <a:ext cx="3474720" cy="457200"/>
-          </a:xfrm>
-          <a:prstGeom prst="rect">
-            <a:avLst/>
-          </a:prstGeom>
-          <a:noFill/>
-        </p:spPr>
-        <p:txBody>
-          <a:bodyPr wrap="square" lIns="36576" rIns="36576" tIns="18288" bIns="18288" anchor="t">
-            <a:spAutoFit/>
-          </a:bodyPr>
-          <a:lstStyle/>
-          <a:p>
-            <a:pPr algn="l">
-              <a:lnSpc>
-                <a:spcPct val="100000"/>
-              </a:lnSpc>
-              <a:spcAft>
-                <a:spcPts val="0"/>
-              </a:spcAft>
-            </a:pPr>
-            <a:r>
-              <a:rPr sz="2000" b="1">
-                <a:solidFill>
-                  <a:srgbClr val="111827"/>
-                </a:solidFill>
-                <a:latin typeface="Segoe UI"/>
-              </a:rPr>
-              <a:t>Team</a:t>
-            </a:r>
-          </a:p>
-        </p:txBody>
-      </p:sp>
-      <p:sp>
-        <p:nvSpPr>
-          <p:cNvPr id="8" name="TextBox 7"/>
-          <p:cNvSpPr txBox="1"/>
-          <p:nvPr/>
-        </p:nvSpPr>
-        <p:spPr>
-          <a:xfrm>
-            <a:off x="7955279" y="1691640"/>
-            <a:ext cx="3566160" cy="411480"/>
-          </a:xfrm>
-          <a:prstGeom prst="rect">
-            <a:avLst/>
-          </a:prstGeom>
-          <a:noFill/>
-        </p:spPr>
-        <p:txBody>
-          <a:bodyPr wrap="square" lIns="36576" rIns="36576" tIns="18288" bIns="18288" anchor="t">
-            <a:spAutoFit/>
-          </a:bodyPr>
-          <a:lstStyle/>
-          <a:p>
-            <a:pPr algn="l">
-              <a:lnSpc>
-                <a:spcPct val="100000"/>
-              </a:lnSpc>
-              <a:spcAft>
-                <a:spcPts val="0"/>
-              </a:spcAft>
-            </a:pPr>
-            <a:r>
-              <a:rPr sz="1800" b="1">
-                <a:solidFill>
-                  <a:srgbClr val="111827"/>
-                </a:solidFill>
-                <a:latin typeface="Segoe UI"/>
-              </a:rPr>
-              <a:t>NYASHADAM SRIKAR</a:t>
-            </a:r>
-          </a:p>
-        </p:txBody>
-      </p:sp>
-      <p:sp>
-        <p:nvSpPr>
-          <p:cNvPr id="9" name="TextBox 8"/>
-          <p:cNvSpPr txBox="1"/>
-          <p:nvPr/>
-        </p:nvSpPr>
-        <p:spPr>
-          <a:xfrm>
-            <a:off x="7955279" y="2057400"/>
-            <a:ext cx="3566160" cy="411480"/>
-          </a:xfrm>
-          <a:prstGeom prst="rect">
-            <a:avLst/>
-          </a:prstGeom>
-          <a:noFill/>
-        </p:spPr>
-        <p:txBody>
-          <a:bodyPr wrap="square" lIns="36576" rIns="36576" tIns="18288" bIns="18288" anchor="t">
-            <a:spAutoFit/>
-          </a:bodyPr>
-          <a:lstStyle/>
-          <a:p>
-            <a:pPr algn="l">
-              <a:lnSpc>
-                <a:spcPct val="100000"/>
-              </a:lnSpc>
-              <a:spcAft>
-                <a:spcPts val="0"/>
-              </a:spcAft>
-            </a:pPr>
-            <a:r>
-              <a:rPr sz="1800" b="0">
-                <a:solidFill>
-                  <a:srgbClr val="6B7280"/>
-                </a:solidFill>
-                <a:latin typeface="Segoe UI"/>
-              </a:rPr>
-              <a:t>2510030006</a:t>
-            </a:r>
-          </a:p>
-        </p:txBody>
-      </p:sp>
-      <p:sp>
-        <p:nvSpPr>
-          <p:cNvPr id="10" name="TextBox 9"/>
-          <p:cNvSpPr txBox="1"/>
-          <p:nvPr/>
-        </p:nvSpPr>
-        <p:spPr>
-          <a:xfrm>
-            <a:off x="7955279" y="2606040"/>
-            <a:ext cx="3566160" cy="411480"/>
-          </a:xfrm>
-          <a:prstGeom prst="rect">
-            <a:avLst/>
-          </a:prstGeom>
-          <a:noFill/>
-        </p:spPr>
-        <p:txBody>
-          <a:bodyPr wrap="square" lIns="36576" rIns="36576" tIns="18288" bIns="18288" anchor="t">
-            <a:spAutoFit/>
-          </a:bodyPr>
-          <a:lstStyle/>
-          <a:p>
-            <a:pPr algn="l">
-              <a:lnSpc>
-                <a:spcPct val="100000"/>
-              </a:lnSpc>
-              <a:spcAft>
-                <a:spcPts val="0"/>
-              </a:spcAft>
-            </a:pPr>
-            <a:r>
-              <a:rPr sz="1800" b="1">
-                <a:solidFill>
-                  <a:srgbClr val="111827"/>
-                </a:solidFill>
-                <a:latin typeface="Segoe UI"/>
-              </a:rPr>
-              <a:t>MALLALA SRI CHARAN</a:t>
-            </a:r>
-          </a:p>
-        </p:txBody>
-      </p:sp>
-      <p:sp>
-        <p:nvSpPr>
-          <p:cNvPr id="11" name="TextBox 10"/>
-          <p:cNvSpPr txBox="1"/>
-          <p:nvPr/>
-        </p:nvSpPr>
-        <p:spPr>
-          <a:xfrm>
-            <a:off x="7955279" y="2971800"/>
-            <a:ext cx="3566160" cy="411480"/>
-          </a:xfrm>
-          <a:prstGeom prst="rect">
-            <a:avLst/>
-          </a:prstGeom>
-          <a:noFill/>
-        </p:spPr>
-        <p:txBody>
-          <a:bodyPr wrap="square" lIns="36576" rIns="36576" tIns="18288" bIns="18288" anchor="t">
-            <a:spAutoFit/>
-          </a:bodyPr>
-          <a:lstStyle/>
-          <a:p>
-            <a:pPr algn="l">
-              <a:lnSpc>
-                <a:spcPct val="100000"/>
-              </a:lnSpc>
-              <a:spcAft>
-                <a:spcPts val="0"/>
-              </a:spcAft>
-            </a:pPr>
-            <a:r>
-              <a:rPr sz="1800" b="0">
-                <a:solidFill>
-                  <a:srgbClr val="6B7280"/>
-                </a:solidFill>
-                <a:latin typeface="Segoe UI"/>
-              </a:rPr>
-              <a:t>2510030246</a:t>
-            </a:r>
-          </a:p>
-        </p:txBody>
-      </p:sp>
-      <p:sp>
-        <p:nvSpPr>
-          <p:cNvPr id="12" name="TextBox 11"/>
-          <p:cNvSpPr txBox="1"/>
-          <p:nvPr/>
-        </p:nvSpPr>
-        <p:spPr>
-          <a:xfrm>
-            <a:off x="7955279" y="3520440"/>
-            <a:ext cx="3566160" cy="411480"/>
-          </a:xfrm>
-          <a:prstGeom prst="rect">
-            <a:avLst/>
-          </a:prstGeom>
-          <a:noFill/>
-        </p:spPr>
-        <p:txBody>
-          <a:bodyPr wrap="square" lIns="36576" rIns="36576" tIns="18288" bIns="18288" anchor="t">
-            <a:spAutoFit/>
-          </a:bodyPr>
-          <a:lstStyle/>
-          <a:p>
-            <a:pPr algn="l">
-              <a:lnSpc>
-                <a:spcPct val="100000"/>
-              </a:lnSpc>
-              <a:spcAft>
-                <a:spcPts val="0"/>
-              </a:spcAft>
-            </a:pPr>
-            <a:r>
-              <a:rPr sz="1800" b="1">
-                <a:solidFill>
-                  <a:srgbClr val="111827"/>
-                </a:solidFill>
-                <a:latin typeface="Segoe UI"/>
-              </a:rPr>
-              <a:t>YOGENDRA UNGARALA</a:t>
-            </a:r>
-          </a:p>
-        </p:txBody>
-      </p:sp>
-      <p:sp>
-        <p:nvSpPr>
-          <p:cNvPr id="13" name="TextBox 12"/>
-          <p:cNvSpPr txBox="1"/>
-          <p:nvPr/>
-        </p:nvSpPr>
-        <p:spPr>
-          <a:xfrm>
-            <a:off x="7955279" y="3886200"/>
-            <a:ext cx="3566160" cy="411480"/>
-          </a:xfrm>
-          <a:prstGeom prst="rect">
-            <a:avLst/>
-          </a:prstGeom>
-          <a:noFill/>
-        </p:spPr>
-        <p:txBody>
-          <a:bodyPr wrap="square" lIns="36576" rIns="36576" tIns="18288" bIns="18288" anchor="t">
-            <a:spAutoFit/>
-          </a:bodyPr>
-          <a:lstStyle/>
-          <a:p>
-            <a:pPr algn="l">
-              <a:lnSpc>
-                <a:spcPct val="100000"/>
-              </a:lnSpc>
-              <a:spcAft>
-                <a:spcPts val="0"/>
-              </a:spcAft>
-            </a:pPr>
-            <a:r>
-              <a:rPr sz="1800" b="0">
-                <a:solidFill>
-                  <a:srgbClr val="6B7280"/>
-                </a:solidFill>
-                <a:latin typeface="Segoe UI"/>
-              </a:rPr>
-              <a:t>2510030147</a:t>
-            </a:r>
-          </a:p>
-        </p:txBody>
-      </p:sp>
-      <p:sp>
-        <p:nvSpPr>
-          <p:cNvPr id="14" name="TextBox 13"/>
-          <p:cNvSpPr txBox="1"/>
-          <p:nvPr/>
-        </p:nvSpPr>
-        <p:spPr>
-          <a:xfrm>
-            <a:off x="7955279" y="4434840"/>
-            <a:ext cx="3566160" cy="411480"/>
-          </a:xfrm>
-          <a:prstGeom prst="rect">
-            <a:avLst/>
-          </a:prstGeom>
-          <a:noFill/>
-        </p:spPr>
-        <p:txBody>
-          <a:bodyPr wrap="square" lIns="36576" rIns="36576" tIns="18288" bIns="18288" anchor="t">
-            <a:spAutoFit/>
-          </a:bodyPr>
-          <a:lstStyle/>
-          <a:p>
-            <a:pPr algn="l">
-              <a:lnSpc>
-                <a:spcPct val="100000"/>
-              </a:lnSpc>
-              <a:spcAft>
-                <a:spcPts val="0"/>
-              </a:spcAft>
-            </a:pPr>
-            <a:r>
-              <a:rPr sz="1800" b="1">
-                <a:solidFill>
-                  <a:srgbClr val="111827"/>
-                </a:solidFill>
-                <a:latin typeface="Segoe UI"/>
-              </a:rPr>
-              <a:t>GORANTAL PRANAV</a:t>
-            </a:r>
-          </a:p>
-        </p:txBody>
-      </p:sp>
-      <p:sp>
-        <p:nvSpPr>
-          <p:cNvPr id="15" name="TextBox 14"/>
-          <p:cNvSpPr txBox="1"/>
-          <p:nvPr/>
-        </p:nvSpPr>
-        <p:spPr>
-          <a:xfrm>
-            <a:off x="7955279" y="4800600"/>
-            <a:ext cx="3566160" cy="411480"/>
-          </a:xfrm>
-          <a:prstGeom prst="rect">
-            <a:avLst/>
-          </a:prstGeom>
-          <a:noFill/>
-        </p:spPr>
-        <p:txBody>
-          <a:bodyPr wrap="square" lIns="36576" rIns="36576" tIns="18288" bIns="18288" anchor="t">
-            <a:spAutoFit/>
-          </a:bodyPr>
-          <a:lstStyle/>
-          <a:p>
-            <a:pPr algn="l">
-              <a:lnSpc>
-                <a:spcPct val="100000"/>
-              </a:lnSpc>
-              <a:spcAft>
-                <a:spcPts val="0"/>
-              </a:spcAft>
-            </a:pPr>
-            <a:r>
-              <a:rPr sz="1800" b="0">
-                <a:solidFill>
-                  <a:srgbClr val="6B7280"/>
-                </a:solidFill>
-                <a:latin typeface="Segoe UI"/>
-              </a:rPr>
-              <a:t>2510030008</a:t>
             </a:r>
           </a:p>
         </p:txBody>
@@ -5325,6 +4820,7 @@
           <a:lstStyle/>
           <a:p>
             <a:pPr algn="ctr"/>
+            <a:endParaRPr/>
           </a:p>
         </p:txBody>
       </p:sp>
@@ -5345,7 +4841,7 @@
           <a:noFill/>
         </p:spPr>
         <p:txBody>
-          <a:bodyPr wrap="square" lIns="36576" rIns="36576" tIns="18288" bIns="18288" anchor="t">
+          <a:bodyPr wrap="square" lIns="36576" tIns="18288" rIns="36576" bIns="18288" anchor="t">
             <a:spAutoFit/>
           </a:bodyPr>
           <a:lstStyle/>
@@ -5379,7 +4875,7 @@
 </file>
 
 <file path=ppt/slides/slide10.xml><?xml version="1.0" encoding="utf-8"?>
-<p:sld xmlns:a="http://schemas.openxmlformats.org/drawingml/2006/main" xmlns:p="http://schemas.openxmlformats.org/presentationml/2006/main" xmlns:r="http://schemas.openxmlformats.org/officeDocument/2006/relationships">
+<p:sld xmlns:a="http://schemas.openxmlformats.org/drawingml/2006/main" xmlns:r="http://schemas.openxmlformats.org/officeDocument/2006/relationships" xmlns:p="http://schemas.openxmlformats.org/presentationml/2006/main">
   <p:cSld>
     <p:spTree>
       <p:nvGrpSpPr>
@@ -5387,7 +4883,14 @@
         <p:cNvGrpSpPr/>
         <p:nvPr/>
       </p:nvGrpSpPr>
-      <p:grpSpPr/>
+      <p:grpSpPr>
+        <a:xfrm>
+          <a:off x="0" y="0"/>
+          <a:ext cx="0" cy="0"/>
+          <a:chOff x="0" y="0"/>
+          <a:chExt cx="0" cy="0"/>
+        </a:xfrm>
+      </p:grpSpPr>
       <p:sp>
         <p:nvSpPr>
           <p:cNvPr id="2" name="Rectangle 1"/>
@@ -5429,6 +4932,7 @@
           <a:lstStyle/>
           <a:p>
             <a:pPr algn="ctr"/>
+            <a:endParaRPr/>
           </a:p>
         </p:txBody>
       </p:sp>
@@ -5449,7 +4953,7 @@
           <a:noFill/>
         </p:spPr>
         <p:txBody>
-          <a:bodyPr wrap="square" lIns="36576" rIns="36576" tIns="18288" bIns="18288" anchor="t">
+          <a:bodyPr wrap="square" lIns="36576" tIns="18288" rIns="36576" bIns="18288" anchor="t">
             <a:spAutoFit/>
           </a:bodyPr>
           <a:lstStyle/>
@@ -5491,7 +4995,7 @@
           <a:noFill/>
         </p:spPr>
         <p:txBody>
-          <a:bodyPr wrap="square" lIns="36576" rIns="36576" tIns="18288" bIns="18288" anchor="t">
+          <a:bodyPr wrap="square" lIns="36576" tIns="18288" rIns="36576" bIns="18288" anchor="t">
             <a:spAutoFit/>
           </a:bodyPr>
           <a:lstStyle/>
@@ -5553,7 +5057,7 @@
           </a:fontRef>
         </p:style>
         <p:txBody>
-          <a:bodyPr rtlCol="0" anchor="ctr" lIns="0" rIns="0" tIns="0" bIns="0"/>
+          <a:bodyPr lIns="0" tIns="0" rIns="0" bIns="0" rtlCol="0" anchor="ctr"/>
           <a:lstStyle/>
           <a:p>
             <a:pPr algn="ctr"/>
@@ -5586,7 +5090,7 @@
           <a:noFill/>
         </p:spPr>
         <p:txBody>
-          <a:bodyPr wrap="square" lIns="36576" rIns="36576" tIns="18288" bIns="18288" anchor="ctr">
+          <a:bodyPr wrap="square" lIns="36576" tIns="18288" rIns="36576" bIns="18288" anchor="ctr">
             <a:spAutoFit/>
           </a:bodyPr>
           <a:lstStyle/>
@@ -5648,7 +5152,7 @@
           </a:fontRef>
         </p:style>
         <p:txBody>
-          <a:bodyPr rtlCol="0" anchor="ctr" lIns="0" rIns="0" tIns="0" bIns="0"/>
+          <a:bodyPr lIns="0" tIns="0" rIns="0" bIns="0" rtlCol="0" anchor="ctr"/>
           <a:lstStyle/>
           <a:p>
             <a:pPr algn="ctr"/>
@@ -5681,7 +5185,7 @@
           <a:noFill/>
         </p:spPr>
         <p:txBody>
-          <a:bodyPr wrap="square" lIns="36576" rIns="36576" tIns="18288" bIns="18288" anchor="ctr">
+          <a:bodyPr wrap="square" lIns="36576" tIns="18288" rIns="36576" bIns="18288" anchor="ctr">
             <a:spAutoFit/>
           </a:bodyPr>
           <a:lstStyle/>
@@ -5743,7 +5247,7 @@
           </a:fontRef>
         </p:style>
         <p:txBody>
-          <a:bodyPr rtlCol="0" anchor="ctr" lIns="0" rIns="0" tIns="0" bIns="0"/>
+          <a:bodyPr lIns="0" tIns="0" rIns="0" bIns="0" rtlCol="0" anchor="ctr"/>
           <a:lstStyle/>
           <a:p>
             <a:pPr algn="ctr"/>
@@ -5776,7 +5280,7 @@
           <a:noFill/>
         </p:spPr>
         <p:txBody>
-          <a:bodyPr wrap="square" lIns="36576" rIns="36576" tIns="18288" bIns="18288" anchor="ctr">
+          <a:bodyPr wrap="square" lIns="36576" tIns="18288" rIns="36576" bIns="18288" anchor="ctr">
             <a:spAutoFit/>
           </a:bodyPr>
           <a:lstStyle/>
@@ -5844,6 +5348,7 @@
           <a:lstStyle/>
           <a:p>
             <a:pPr algn="ctr"/>
+            <a:endParaRPr/>
           </a:p>
         </p:txBody>
       </p:sp>
@@ -5864,7 +5369,7 @@
           <a:noFill/>
         </p:spPr>
         <p:txBody>
-          <a:bodyPr wrap="square" lIns="36576" rIns="36576" tIns="18288" bIns="18288" anchor="ctr">
+          <a:bodyPr wrap="square" lIns="36576" tIns="18288" rIns="36576" bIns="18288" anchor="ctr">
             <a:spAutoFit/>
           </a:bodyPr>
           <a:lstStyle/>
@@ -5931,7 +5436,7 @@
           </a:fontRef>
         </p:style>
         <p:txBody>
-          <a:bodyPr rtlCol="0" anchor="ctr" wrap="square"/>
+          <a:bodyPr wrap="square" rtlCol="0" anchor="ctr"/>
           <a:lstStyle/>
           <a:p>
             <a:pPr algn="ctr"/>
@@ -5964,7 +5469,7 @@
           <a:noFill/>
         </p:spPr>
         <p:txBody>
-          <a:bodyPr wrap="square" lIns="36576" rIns="36576" tIns="18288" bIns="18288" anchor="t">
+          <a:bodyPr wrap="square" lIns="36576" tIns="18288" rIns="36576" bIns="18288" anchor="t">
             <a:spAutoFit/>
           </a:bodyPr>
           <a:lstStyle/>
@@ -6006,7 +5511,7 @@
           <a:noFill/>
         </p:spPr>
         <p:txBody>
-          <a:bodyPr wrap="square" lIns="36576" rIns="36576" tIns="18288" bIns="18288" anchor="t">
+          <a:bodyPr wrap="square" lIns="36576" tIns="18288" rIns="36576" bIns="18288" anchor="t">
             <a:spAutoFit/>
           </a:bodyPr>
           <a:lstStyle/>
@@ -6040,7 +5545,7 @@
 </file>
 
 <file path=ppt/slides/slide2.xml><?xml version="1.0" encoding="utf-8"?>
-<p:sld xmlns:a="http://schemas.openxmlformats.org/drawingml/2006/main" xmlns:p="http://schemas.openxmlformats.org/presentationml/2006/main" xmlns:r="http://schemas.openxmlformats.org/officeDocument/2006/relationships">
+<p:sld xmlns:a="http://schemas.openxmlformats.org/drawingml/2006/main" xmlns:r="http://schemas.openxmlformats.org/officeDocument/2006/relationships" xmlns:p="http://schemas.openxmlformats.org/presentationml/2006/main">
   <p:cSld>
     <p:spTree>
       <p:nvGrpSpPr>
@@ -6048,7 +5553,14 @@
         <p:cNvGrpSpPr/>
         <p:nvPr/>
       </p:nvGrpSpPr>
-      <p:grpSpPr/>
+      <p:grpSpPr>
+        <a:xfrm>
+          <a:off x="0" y="0"/>
+          <a:ext cx="0" cy="0"/>
+          <a:chOff x="0" y="0"/>
+          <a:chExt cx="0" cy="0"/>
+        </a:xfrm>
+      </p:grpSpPr>
       <p:sp>
         <p:nvSpPr>
           <p:cNvPr id="2" name="Rectangle 1"/>
@@ -6090,6 +5602,7 @@
           <a:lstStyle/>
           <a:p>
             <a:pPr algn="ctr"/>
+            <a:endParaRPr/>
           </a:p>
         </p:txBody>
       </p:sp>
@@ -6110,7 +5623,7 @@
           <a:noFill/>
         </p:spPr>
         <p:txBody>
-          <a:bodyPr wrap="square" lIns="36576" rIns="36576" tIns="18288" bIns="18288" anchor="t">
+          <a:bodyPr wrap="square" lIns="36576" tIns="18288" rIns="36576" bIns="18288" anchor="t">
             <a:spAutoFit/>
           </a:bodyPr>
           <a:lstStyle/>
@@ -6152,7 +5665,7 @@
           <a:noFill/>
         </p:spPr>
         <p:txBody>
-          <a:bodyPr wrap="square" lIns="36576" rIns="36576" tIns="18288" bIns="18288" anchor="t">
+          <a:bodyPr wrap="square" lIns="36576" tIns="18288" rIns="36576" bIns="18288" anchor="t">
             <a:spAutoFit/>
           </a:bodyPr>
           <a:lstStyle/>
@@ -6220,6 +5733,7 @@
           <a:lstStyle/>
           <a:p>
             <a:pPr algn="ctr"/>
+            <a:endParaRPr/>
           </a:p>
         </p:txBody>
       </p:sp>
@@ -6240,7 +5754,7 @@
           <a:noFill/>
         </p:spPr>
         <p:txBody>
-          <a:bodyPr wrap="square" lIns="36576" rIns="36576" tIns="18288" bIns="18288" anchor="t">
+          <a:bodyPr wrap="square" lIns="36576" tIns="18288" rIns="36576" bIns="18288" anchor="t">
             <a:spAutoFit/>
           </a:bodyPr>
           <a:lstStyle/>
@@ -6310,6 +5824,7 @@
           <a:lstStyle/>
           <a:p>
             <a:pPr algn="ctr"/>
+            <a:endParaRPr/>
           </a:p>
         </p:txBody>
       </p:sp>
@@ -6330,7 +5845,7 @@
           <a:noFill/>
         </p:spPr>
         <p:txBody>
-          <a:bodyPr wrap="square" lIns="36576" rIns="36576" tIns="18288" bIns="18288" anchor="t">
+          <a:bodyPr wrap="square" lIns="36576" tIns="18288" rIns="36576" bIns="18288" anchor="t">
             <a:spAutoFit/>
           </a:bodyPr>
           <a:lstStyle/>
@@ -6372,7 +5887,7 @@
           <a:noFill/>
         </p:spPr>
         <p:txBody>
-          <a:bodyPr wrap="square" lIns="36576" rIns="36576" tIns="18288" bIns="18288" anchor="t">
+          <a:bodyPr wrap="square" lIns="36576" tIns="18288" rIns="36576" bIns="18288" anchor="t">
             <a:spAutoFit/>
           </a:bodyPr>
           <a:lstStyle/>
@@ -6414,7 +5929,7 @@
           <a:noFill/>
         </p:spPr>
         <p:txBody>
-          <a:bodyPr wrap="square" lIns="36576" rIns="36576" tIns="18288" bIns="18288" anchor="t">
+          <a:bodyPr wrap="square" lIns="36576" tIns="18288" rIns="36576" bIns="18288" anchor="t">
             <a:spAutoFit/>
           </a:bodyPr>
           <a:lstStyle/>
@@ -6456,7 +5971,7 @@
           <a:noFill/>
         </p:spPr>
         <p:txBody>
-          <a:bodyPr wrap="square" lIns="36576" rIns="36576" tIns="18288" bIns="18288" anchor="t">
+          <a:bodyPr wrap="square" lIns="36576" tIns="18288" rIns="36576" bIns="18288" anchor="t">
             <a:spAutoFit/>
           </a:bodyPr>
           <a:lstStyle/>
@@ -6498,7 +6013,7 @@
           <a:noFill/>
         </p:spPr>
         <p:txBody>
-          <a:bodyPr wrap="square" lIns="36576" rIns="36576" tIns="18288" bIns="18288" anchor="t">
+          <a:bodyPr wrap="square" lIns="36576" tIns="18288" rIns="36576" bIns="18288" anchor="t">
             <a:spAutoFit/>
           </a:bodyPr>
           <a:lstStyle/>
@@ -6540,7 +6055,7 @@
           <a:noFill/>
         </p:spPr>
         <p:txBody>
-          <a:bodyPr wrap="square" lIns="36576" rIns="36576" tIns="18288" bIns="18288" anchor="t">
+          <a:bodyPr wrap="square" lIns="36576" tIns="18288" rIns="36576" bIns="18288" anchor="t">
             <a:spAutoFit/>
           </a:bodyPr>
           <a:lstStyle/>
@@ -6582,7 +6097,7 @@
           <a:noFill/>
         </p:spPr>
         <p:txBody>
-          <a:bodyPr wrap="square" lIns="36576" rIns="36576" tIns="18288" bIns="18288" anchor="t">
+          <a:bodyPr wrap="square" lIns="36576" tIns="18288" rIns="36576" bIns="18288" anchor="t">
             <a:spAutoFit/>
           </a:bodyPr>
           <a:lstStyle/>
@@ -6624,7 +6139,7 @@
           <a:noFill/>
         </p:spPr>
         <p:txBody>
-          <a:bodyPr wrap="square" lIns="36576" rIns="36576" tIns="18288" bIns="18288" anchor="t">
+          <a:bodyPr wrap="square" lIns="36576" tIns="18288" rIns="36576" bIns="18288" anchor="t">
             <a:spAutoFit/>
           </a:bodyPr>
           <a:lstStyle/>
@@ -6666,7 +6181,7 @@
           <a:noFill/>
         </p:spPr>
         <p:txBody>
-          <a:bodyPr wrap="square" lIns="36576" rIns="36576" tIns="18288" bIns="18288" anchor="t">
+          <a:bodyPr wrap="square" lIns="36576" tIns="18288" rIns="36576" bIns="18288" anchor="t">
             <a:spAutoFit/>
           </a:bodyPr>
           <a:lstStyle/>
@@ -6708,7 +6223,7 @@
           <a:noFill/>
         </p:spPr>
         <p:txBody>
-          <a:bodyPr wrap="square" lIns="36576" rIns="36576" tIns="18288" bIns="18288" anchor="t">
+          <a:bodyPr wrap="square" lIns="36576" tIns="18288" rIns="36576" bIns="18288" anchor="t">
             <a:spAutoFit/>
           </a:bodyPr>
           <a:lstStyle/>
@@ -6750,7 +6265,7 @@
           <a:noFill/>
         </p:spPr>
         <p:txBody>
-          <a:bodyPr wrap="square" lIns="36576" rIns="36576" tIns="18288" bIns="18288" anchor="t">
+          <a:bodyPr wrap="square" lIns="36576" tIns="18288" rIns="36576" bIns="18288" anchor="t">
             <a:spAutoFit/>
           </a:bodyPr>
           <a:lstStyle/>
@@ -6792,7 +6307,7 @@
           <a:noFill/>
         </p:spPr>
         <p:txBody>
-          <a:bodyPr wrap="square" lIns="36576" rIns="36576" tIns="18288" bIns="18288" anchor="t">
+          <a:bodyPr wrap="square" lIns="36576" tIns="18288" rIns="36576" bIns="18288" anchor="t">
             <a:spAutoFit/>
           </a:bodyPr>
           <a:lstStyle/>
@@ -6834,7 +6349,7 @@
           <a:noFill/>
         </p:spPr>
         <p:txBody>
-          <a:bodyPr wrap="square" lIns="36576" rIns="36576" tIns="18288" bIns="18288" anchor="t">
+          <a:bodyPr wrap="square" lIns="36576" tIns="18288" rIns="36576" bIns="18288" anchor="t">
             <a:spAutoFit/>
           </a:bodyPr>
           <a:lstStyle/>
@@ -6904,7 +6419,7 @@
 </file>
 
 <file path=ppt/slides/slide3.xml><?xml version="1.0" encoding="utf-8"?>
-<p:sld xmlns:a="http://schemas.openxmlformats.org/drawingml/2006/main" xmlns:p="http://schemas.openxmlformats.org/presentationml/2006/main" xmlns:r="http://schemas.openxmlformats.org/officeDocument/2006/relationships">
+<p:sld xmlns:a="http://schemas.openxmlformats.org/drawingml/2006/main" xmlns:r="http://schemas.openxmlformats.org/officeDocument/2006/relationships" xmlns:p="http://schemas.openxmlformats.org/presentationml/2006/main">
   <p:cSld>
     <p:spTree>
       <p:nvGrpSpPr>
@@ -6912,7 +6427,14 @@
         <p:cNvGrpSpPr/>
         <p:nvPr/>
       </p:nvGrpSpPr>
-      <p:grpSpPr/>
+      <p:grpSpPr>
+        <a:xfrm>
+          <a:off x="0" y="0"/>
+          <a:ext cx="0" cy="0"/>
+          <a:chOff x="0" y="0"/>
+          <a:chExt cx="0" cy="0"/>
+        </a:xfrm>
+      </p:grpSpPr>
       <p:sp>
         <p:nvSpPr>
           <p:cNvPr id="2" name="Rectangle 1"/>
@@ -6954,6 +6476,7 @@
           <a:lstStyle/>
           <a:p>
             <a:pPr algn="ctr"/>
+            <a:endParaRPr/>
           </a:p>
         </p:txBody>
       </p:sp>
@@ -6974,7 +6497,7 @@
           <a:noFill/>
         </p:spPr>
         <p:txBody>
-          <a:bodyPr wrap="square" lIns="36576" rIns="36576" tIns="18288" bIns="18288" anchor="t">
+          <a:bodyPr wrap="square" lIns="36576" tIns="18288" rIns="36576" bIns="18288" anchor="t">
             <a:spAutoFit/>
           </a:bodyPr>
           <a:lstStyle/>
@@ -7040,7 +6563,7 @@
           </a:fontRef>
         </p:style>
         <p:txBody>
-          <a:bodyPr rtlCol="0" anchor="ctr" wrap="square" lIns="73152" rIns="73152"/>
+          <a:bodyPr wrap="square" lIns="73152" rIns="73152" rtlCol="0" anchor="ctr"/>
           <a:lstStyle/>
           <a:p>
             <a:pPr algn="ctr"/>
@@ -7073,7 +6596,7 @@
           <a:noFill/>
         </p:spPr>
         <p:txBody>
-          <a:bodyPr wrap="square" lIns="36576" rIns="36576" tIns="18288" bIns="18288" anchor="t">
+          <a:bodyPr wrap="square" lIns="36576" tIns="18288" rIns="36576" bIns="18288" anchor="t">
             <a:spAutoFit/>
           </a:bodyPr>
           <a:lstStyle/>
@@ -7117,18 +6640,60 @@
                 <a:tableStyleId>{5C22544A-7EE6-4342-B048-85BDC9FD1C3A}</a:tableStyleId>
               </a:tblPr>
               <a:tblGrid>
-                <a:gridCol w="2697480"/>
-                <a:gridCol w="1394459"/>
-                <a:gridCol w="1394459"/>
-                <a:gridCol w="1394459"/>
-                <a:gridCol w="1394459"/>
-                <a:gridCol w="1394459"/>
-                <a:gridCol w="1394459"/>
+                <a:gridCol w="2697480">
+                  <a:extLst>
+                    <a:ext uri="{9D8B030D-6E8A-4147-A177-3AD203B41FA5}">
+                      <a16:colId xmlns:a16="http://schemas.microsoft.com/office/drawing/2014/main" val="20000"/>
+                    </a:ext>
+                  </a:extLst>
+                </a:gridCol>
+                <a:gridCol w="1394459">
+                  <a:extLst>
+                    <a:ext uri="{9D8B030D-6E8A-4147-A177-3AD203B41FA5}">
+                      <a16:colId xmlns:a16="http://schemas.microsoft.com/office/drawing/2014/main" val="20001"/>
+                    </a:ext>
+                  </a:extLst>
+                </a:gridCol>
+                <a:gridCol w="1394459">
+                  <a:extLst>
+                    <a:ext uri="{9D8B030D-6E8A-4147-A177-3AD203B41FA5}">
+                      <a16:colId xmlns:a16="http://schemas.microsoft.com/office/drawing/2014/main" val="20002"/>
+                    </a:ext>
+                  </a:extLst>
+                </a:gridCol>
+                <a:gridCol w="1394459">
+                  <a:extLst>
+                    <a:ext uri="{9D8B030D-6E8A-4147-A177-3AD203B41FA5}">
+                      <a16:colId xmlns:a16="http://schemas.microsoft.com/office/drawing/2014/main" val="20003"/>
+                    </a:ext>
+                  </a:extLst>
+                </a:gridCol>
+                <a:gridCol w="1394459">
+                  <a:extLst>
+                    <a:ext uri="{9D8B030D-6E8A-4147-A177-3AD203B41FA5}">
+                      <a16:colId xmlns:a16="http://schemas.microsoft.com/office/drawing/2014/main" val="20004"/>
+                    </a:ext>
+                  </a:extLst>
+                </a:gridCol>
+                <a:gridCol w="1394459">
+                  <a:extLst>
+                    <a:ext uri="{9D8B030D-6E8A-4147-A177-3AD203B41FA5}">
+                      <a16:colId xmlns:a16="http://schemas.microsoft.com/office/drawing/2014/main" val="20005"/>
+                    </a:ext>
+                  </a:extLst>
+                </a:gridCol>
+                <a:gridCol w="1394459">
+                  <a:extLst>
+                    <a:ext uri="{9D8B030D-6E8A-4147-A177-3AD203B41FA5}">
+                      <a16:colId xmlns:a16="http://schemas.microsoft.com/office/drawing/2014/main" val="20006"/>
+                    </a:ext>
+                  </a:extLst>
+                </a:gridCol>
               </a:tblGrid>
               <a:tr h="1280160">
                 <a:tc>
                   <a:txBody>
-                    <a:bodyPr wrap="square"/>
+                    <a:bodyPr/>
                     <a:lstStyle/>
                     <a:p>
                       <a:pPr algn="l"/>
@@ -7143,7 +6708,7 @@
                       </a:r>
                     </a:p>
                   </a:txBody>
-                  <a:tcPr anchor="ctr" marL="73152" marR="73152">
+                  <a:tcPr marL="73152" marR="73152" anchor="ctr">
                     <a:solidFill>
                       <a:srgbClr val="F3F4F6"/>
                     </a:solidFill>
@@ -7151,7 +6716,7 @@
                 </a:tc>
                 <a:tc>
                   <a:txBody>
-                    <a:bodyPr wrap="square"/>
+                    <a:bodyPr/>
                     <a:lstStyle/>
                     <a:p>
                       <a:pPr algn="ctr"/>
@@ -7166,7 +6731,7 @@
                       </a:r>
                     </a:p>
                   </a:txBody>
-                  <a:tcPr anchor="ctr" marL="73152" marR="73152">
+                  <a:tcPr marL="73152" marR="73152" anchor="ctr">
                     <a:solidFill>
                       <a:srgbClr val="F3F4F6"/>
                     </a:solidFill>
@@ -7174,7 +6739,7 @@
                 </a:tc>
                 <a:tc>
                   <a:txBody>
-                    <a:bodyPr wrap="square"/>
+                    <a:bodyPr/>
                     <a:lstStyle/>
                     <a:p>
                       <a:pPr algn="ctr"/>
@@ -7189,7 +6754,7 @@
                       </a:r>
                     </a:p>
                   </a:txBody>
-                  <a:tcPr anchor="ctr" marL="73152" marR="73152">
+                  <a:tcPr marL="73152" marR="73152" anchor="ctr">
                     <a:solidFill>
                       <a:srgbClr val="F3F4F6"/>
                     </a:solidFill>
@@ -7197,7 +6762,7 @@
                 </a:tc>
                 <a:tc>
                   <a:txBody>
-                    <a:bodyPr wrap="square"/>
+                    <a:bodyPr/>
                     <a:lstStyle/>
                     <a:p>
                       <a:pPr algn="ctr"/>
@@ -7212,7 +6777,7 @@
                       </a:r>
                     </a:p>
                   </a:txBody>
-                  <a:tcPr anchor="ctr" marL="73152" marR="73152">
+                  <a:tcPr marL="73152" marR="73152" anchor="ctr">
                     <a:solidFill>
                       <a:srgbClr val="F3F4F6"/>
                     </a:solidFill>
@@ -7220,7 +6785,7 @@
                 </a:tc>
                 <a:tc>
                   <a:txBody>
-                    <a:bodyPr wrap="square"/>
+                    <a:bodyPr/>
                     <a:lstStyle/>
                     <a:p>
                       <a:pPr algn="ctr"/>
@@ -7235,7 +6800,7 @@
                       </a:r>
                     </a:p>
                   </a:txBody>
-                  <a:tcPr anchor="ctr" marL="73152" marR="73152">
+                  <a:tcPr marL="73152" marR="73152" anchor="ctr">
                     <a:solidFill>
                       <a:srgbClr val="F3F4F6"/>
                     </a:solidFill>
@@ -7243,7 +6808,7 @@
                 </a:tc>
                 <a:tc>
                   <a:txBody>
-                    <a:bodyPr wrap="square"/>
+                    <a:bodyPr/>
                     <a:lstStyle/>
                     <a:p>
                       <a:pPr algn="ctr"/>
@@ -7258,7 +6823,7 @@
                       </a:r>
                     </a:p>
                   </a:txBody>
-                  <a:tcPr anchor="ctr" marL="73152" marR="73152">
+                  <a:tcPr marL="73152" marR="73152" anchor="ctr">
                     <a:solidFill>
                       <a:srgbClr val="F3F4F6"/>
                     </a:solidFill>
@@ -7266,7 +6831,7 @@
                 </a:tc>
                 <a:tc>
                   <a:txBody>
-                    <a:bodyPr wrap="square"/>
+                    <a:bodyPr/>
                     <a:lstStyle/>
                     <a:p>
                       <a:pPr algn="ctr"/>
@@ -7281,17 +6846,22 @@
                       </a:r>
                     </a:p>
                   </a:txBody>
-                  <a:tcPr anchor="ctr" marL="73152" marR="73152">
+                  <a:tcPr marL="73152" marR="73152" anchor="ctr">
                     <a:solidFill>
                       <a:srgbClr val="F3F4F6"/>
                     </a:solidFill>
                   </a:tcPr>
                 </a:tc>
+                <a:extLst>
+                  <a:ext uri="{0D108BD9-81ED-4DB2-BD59-A6C34878D82A}">
+                    <a16:rowId xmlns:a16="http://schemas.microsoft.com/office/drawing/2014/main" val="10000"/>
+                  </a:ext>
+                </a:extLst>
               </a:tr>
               <a:tr h="731520">
                 <a:tc>
                   <a:txBody>
-                    <a:bodyPr wrap="square"/>
+                    <a:bodyPr/>
                     <a:lstStyle/>
                     <a:p>
                       <a:pPr algn="l"/>
@@ -7306,7 +6876,7 @@
                       </a:r>
                     </a:p>
                   </a:txBody>
-                  <a:tcPr anchor="ctr" marL="73152" marR="73152">
+                  <a:tcPr marL="73152" marR="73152" anchor="ctr">
                     <a:solidFill>
                       <a:srgbClr val="FFFFFF"/>
                     </a:solidFill>
@@ -7314,7 +6884,7 @@
                 </a:tc>
                 <a:tc>
                   <a:txBody>
-                    <a:bodyPr wrap="square"/>
+                    <a:bodyPr/>
                     <a:lstStyle/>
                     <a:p>
                       <a:pPr algn="ctr"/>
@@ -7329,7 +6899,7 @@
                       </a:r>
                     </a:p>
                   </a:txBody>
-                  <a:tcPr anchor="ctr" marL="73152" marR="73152">
+                  <a:tcPr marL="73152" marR="73152" anchor="ctr">
                     <a:solidFill>
                       <a:srgbClr val="FFFFFF"/>
                     </a:solidFill>
@@ -7337,7 +6907,7 @@
                 </a:tc>
                 <a:tc>
                   <a:txBody>
-                    <a:bodyPr wrap="square"/>
+                    <a:bodyPr/>
                     <a:lstStyle/>
                     <a:p>
                       <a:pPr algn="ctr"/>
@@ -7352,7 +6922,7 @@
                       </a:r>
                     </a:p>
                   </a:txBody>
-                  <a:tcPr anchor="ctr" marL="73152" marR="73152">
+                  <a:tcPr marL="73152" marR="73152" anchor="ctr">
                     <a:solidFill>
                       <a:srgbClr val="FFFFFF"/>
                     </a:solidFill>
@@ -7360,7 +6930,7 @@
                 </a:tc>
                 <a:tc>
                   <a:txBody>
-                    <a:bodyPr wrap="square"/>
+                    <a:bodyPr/>
                     <a:lstStyle/>
                     <a:p>
                       <a:pPr algn="ctr"/>
@@ -7375,7 +6945,7 @@
                       </a:r>
                     </a:p>
                   </a:txBody>
-                  <a:tcPr anchor="ctr" marL="73152" marR="73152">
+                  <a:tcPr marL="73152" marR="73152" anchor="ctr">
                     <a:solidFill>
                       <a:srgbClr val="FFFFFF"/>
                     </a:solidFill>
@@ -7383,7 +6953,7 @@
                 </a:tc>
                 <a:tc>
                   <a:txBody>
-                    <a:bodyPr wrap="square"/>
+                    <a:bodyPr/>
                     <a:lstStyle/>
                     <a:p>
                       <a:pPr algn="ctr"/>
@@ -7398,7 +6968,7 @@
                       </a:r>
                     </a:p>
                   </a:txBody>
-                  <a:tcPr anchor="ctr" marL="73152" marR="73152">
+                  <a:tcPr marL="73152" marR="73152" anchor="ctr">
                     <a:solidFill>
                       <a:srgbClr val="FFFFFF"/>
                     </a:solidFill>
@@ -7406,7 +6976,7 @@
                 </a:tc>
                 <a:tc>
                   <a:txBody>
-                    <a:bodyPr wrap="square"/>
+                    <a:bodyPr/>
                     <a:lstStyle/>
                     <a:p>
                       <a:pPr algn="ctr"/>
@@ -7421,7 +6991,7 @@
                       </a:r>
                     </a:p>
                   </a:txBody>
-                  <a:tcPr anchor="ctr" marL="73152" marR="73152">
+                  <a:tcPr marL="73152" marR="73152" anchor="ctr">
                     <a:solidFill>
                       <a:srgbClr val="FFFFFF"/>
                     </a:solidFill>
@@ -7429,7 +6999,7 @@
                 </a:tc>
                 <a:tc>
                   <a:txBody>
-                    <a:bodyPr wrap="square"/>
+                    <a:bodyPr/>
                     <a:lstStyle/>
                     <a:p>
                       <a:pPr algn="ctr"/>
@@ -7444,17 +7014,22 @@
                       </a:r>
                     </a:p>
                   </a:txBody>
-                  <a:tcPr anchor="ctr" marL="73152" marR="73152">
+                  <a:tcPr marL="73152" marR="73152" anchor="ctr">
                     <a:solidFill>
                       <a:srgbClr val="FFFFFF"/>
                     </a:solidFill>
                   </a:tcPr>
                 </a:tc>
+                <a:extLst>
+                  <a:ext uri="{0D108BD9-81ED-4DB2-BD59-A6C34878D82A}">
+                    <a16:rowId xmlns:a16="http://schemas.microsoft.com/office/drawing/2014/main" val="10001"/>
+                  </a:ext>
+                </a:extLst>
               </a:tr>
               <a:tr h="731520">
                 <a:tc>
                   <a:txBody>
-                    <a:bodyPr wrap="square"/>
+                    <a:bodyPr/>
                     <a:lstStyle/>
                     <a:p>
                       <a:pPr algn="l"/>
@@ -7469,7 +7044,7 @@
                       </a:r>
                     </a:p>
                   </a:txBody>
-                  <a:tcPr anchor="ctr" marL="73152" marR="73152">
+                  <a:tcPr marL="73152" marR="73152" anchor="ctr">
                     <a:solidFill>
                       <a:srgbClr val="FFFFFF"/>
                     </a:solidFill>
@@ -7477,7 +7052,7 @@
                 </a:tc>
                 <a:tc>
                   <a:txBody>
-                    <a:bodyPr wrap="square"/>
+                    <a:bodyPr/>
                     <a:lstStyle/>
                     <a:p>
                       <a:pPr algn="ctr"/>
@@ -7492,7 +7067,7 @@
                       </a:r>
                     </a:p>
                   </a:txBody>
-                  <a:tcPr anchor="ctr" marL="73152" marR="73152">
+                  <a:tcPr marL="73152" marR="73152" anchor="ctr">
                     <a:solidFill>
                       <a:srgbClr val="FFFFFF"/>
                     </a:solidFill>
@@ -7500,7 +7075,7 @@
                 </a:tc>
                 <a:tc>
                   <a:txBody>
-                    <a:bodyPr wrap="square"/>
+                    <a:bodyPr/>
                     <a:lstStyle/>
                     <a:p>
                       <a:pPr algn="ctr"/>
@@ -7515,7 +7090,7 @@
                       </a:r>
                     </a:p>
                   </a:txBody>
-                  <a:tcPr anchor="ctr" marL="73152" marR="73152">
+                  <a:tcPr marL="73152" marR="73152" anchor="ctr">
                     <a:solidFill>
                       <a:srgbClr val="FFFFFF"/>
                     </a:solidFill>
@@ -7523,7 +7098,7 @@
                 </a:tc>
                 <a:tc>
                   <a:txBody>
-                    <a:bodyPr wrap="square"/>
+                    <a:bodyPr/>
                     <a:lstStyle/>
                     <a:p>
                       <a:pPr algn="ctr"/>
@@ -7538,7 +7113,7 @@
                       </a:r>
                     </a:p>
                   </a:txBody>
-                  <a:tcPr anchor="ctr" marL="73152" marR="73152">
+                  <a:tcPr marL="73152" marR="73152" anchor="ctr">
                     <a:solidFill>
                       <a:srgbClr val="FFFFFF"/>
                     </a:solidFill>
@@ -7546,7 +7121,7 @@
                 </a:tc>
                 <a:tc>
                   <a:txBody>
-                    <a:bodyPr wrap="square"/>
+                    <a:bodyPr/>
                     <a:lstStyle/>
                     <a:p>
                       <a:pPr algn="ctr"/>
@@ -7561,7 +7136,7 @@
                       </a:r>
                     </a:p>
                   </a:txBody>
-                  <a:tcPr anchor="ctr" marL="73152" marR="73152">
+                  <a:tcPr marL="73152" marR="73152" anchor="ctr">
                     <a:solidFill>
                       <a:srgbClr val="FFFFFF"/>
                     </a:solidFill>
@@ -7569,7 +7144,7 @@
                 </a:tc>
                 <a:tc>
                   <a:txBody>
-                    <a:bodyPr wrap="square"/>
+                    <a:bodyPr/>
                     <a:lstStyle/>
                     <a:p>
                       <a:pPr algn="ctr"/>
@@ -7584,7 +7159,7 @@
                       </a:r>
                     </a:p>
                   </a:txBody>
-                  <a:tcPr anchor="ctr" marL="73152" marR="73152">
+                  <a:tcPr marL="73152" marR="73152" anchor="ctr">
                     <a:solidFill>
                       <a:srgbClr val="FFFFFF"/>
                     </a:solidFill>
@@ -7592,7 +7167,7 @@
                 </a:tc>
                 <a:tc>
                   <a:txBody>
-                    <a:bodyPr wrap="square"/>
+                    <a:bodyPr/>
                     <a:lstStyle/>
                     <a:p>
                       <a:pPr algn="ctr"/>
@@ -7607,17 +7182,22 @@
                       </a:r>
                     </a:p>
                   </a:txBody>
-                  <a:tcPr anchor="ctr" marL="73152" marR="73152">
+                  <a:tcPr marL="73152" marR="73152" anchor="ctr">
                     <a:solidFill>
                       <a:srgbClr val="FFFFFF"/>
                     </a:solidFill>
                   </a:tcPr>
                 </a:tc>
+                <a:extLst>
+                  <a:ext uri="{0D108BD9-81ED-4DB2-BD59-A6C34878D82A}">
+                    <a16:rowId xmlns:a16="http://schemas.microsoft.com/office/drawing/2014/main" val="10002"/>
+                  </a:ext>
+                </a:extLst>
               </a:tr>
               <a:tr h="731520">
                 <a:tc>
                   <a:txBody>
-                    <a:bodyPr wrap="square"/>
+                    <a:bodyPr/>
                     <a:lstStyle/>
                     <a:p>
                       <a:pPr algn="l"/>
@@ -7632,7 +7212,7 @@
                       </a:r>
                     </a:p>
                   </a:txBody>
-                  <a:tcPr anchor="ctr" marL="73152" marR="73152">
+                  <a:tcPr marL="73152" marR="73152" anchor="ctr">
                     <a:solidFill>
                       <a:srgbClr val="FFFFFF"/>
                     </a:solidFill>
@@ -7640,7 +7220,7 @@
                 </a:tc>
                 <a:tc>
                   <a:txBody>
-                    <a:bodyPr wrap="square"/>
+                    <a:bodyPr/>
                     <a:lstStyle/>
                     <a:p>
                       <a:pPr algn="ctr"/>
@@ -7655,7 +7235,7 @@
                       </a:r>
                     </a:p>
                   </a:txBody>
-                  <a:tcPr anchor="ctr" marL="73152" marR="73152">
+                  <a:tcPr marL="73152" marR="73152" anchor="ctr">
                     <a:solidFill>
                       <a:srgbClr val="FFFFFF"/>
                     </a:solidFill>
@@ -7663,7 +7243,7 @@
                 </a:tc>
                 <a:tc>
                   <a:txBody>
-                    <a:bodyPr wrap="square"/>
+                    <a:bodyPr/>
                     <a:lstStyle/>
                     <a:p>
                       <a:pPr algn="ctr"/>
@@ -7678,7 +7258,7 @@
                       </a:r>
                     </a:p>
                   </a:txBody>
-                  <a:tcPr anchor="ctr" marL="73152" marR="73152">
+                  <a:tcPr marL="73152" marR="73152" anchor="ctr">
                     <a:solidFill>
                       <a:srgbClr val="FFFFFF"/>
                     </a:solidFill>
@@ -7686,7 +7266,7 @@
                 </a:tc>
                 <a:tc>
                   <a:txBody>
-                    <a:bodyPr wrap="square"/>
+                    <a:bodyPr/>
                     <a:lstStyle/>
                     <a:p>
                       <a:pPr algn="ctr"/>
@@ -7701,7 +7281,7 @@
                       </a:r>
                     </a:p>
                   </a:txBody>
-                  <a:tcPr anchor="ctr" marL="73152" marR="73152">
+                  <a:tcPr marL="73152" marR="73152" anchor="ctr">
                     <a:solidFill>
                       <a:srgbClr val="FFFFFF"/>
                     </a:solidFill>
@@ -7709,7 +7289,7 @@
                 </a:tc>
                 <a:tc>
                   <a:txBody>
-                    <a:bodyPr wrap="square"/>
+                    <a:bodyPr/>
                     <a:lstStyle/>
                     <a:p>
                       <a:pPr algn="ctr"/>
@@ -7724,7 +7304,7 @@
                       </a:r>
                     </a:p>
                   </a:txBody>
-                  <a:tcPr anchor="ctr" marL="73152" marR="73152">
+                  <a:tcPr marL="73152" marR="73152" anchor="ctr">
                     <a:solidFill>
                       <a:srgbClr val="FFFFFF"/>
                     </a:solidFill>
@@ -7732,7 +7312,7 @@
                 </a:tc>
                 <a:tc>
                   <a:txBody>
-                    <a:bodyPr wrap="square"/>
+                    <a:bodyPr/>
                     <a:lstStyle/>
                     <a:p>
                       <a:pPr algn="ctr"/>
@@ -7747,7 +7327,7 @@
                       </a:r>
                     </a:p>
                   </a:txBody>
-                  <a:tcPr anchor="ctr" marL="73152" marR="73152">
+                  <a:tcPr marL="73152" marR="73152" anchor="ctr">
                     <a:solidFill>
                       <a:srgbClr val="FFFFFF"/>
                     </a:solidFill>
@@ -7755,7 +7335,7 @@
                 </a:tc>
                 <a:tc>
                   <a:txBody>
-                    <a:bodyPr wrap="square"/>
+                    <a:bodyPr/>
                     <a:lstStyle/>
                     <a:p>
                       <a:pPr algn="ctr"/>
@@ -7770,17 +7350,22 @@
                       </a:r>
                     </a:p>
                   </a:txBody>
-                  <a:tcPr anchor="ctr" marL="73152" marR="73152">
+                  <a:tcPr marL="73152" marR="73152" anchor="ctr">
                     <a:solidFill>
                       <a:srgbClr val="FFFFFF"/>
                     </a:solidFill>
                   </a:tcPr>
                 </a:tc>
+                <a:extLst>
+                  <a:ext uri="{0D108BD9-81ED-4DB2-BD59-A6C34878D82A}">
+                    <a16:rowId xmlns:a16="http://schemas.microsoft.com/office/drawing/2014/main" val="10003"/>
+                  </a:ext>
+                </a:extLst>
               </a:tr>
               <a:tr h="731520">
                 <a:tc>
                   <a:txBody>
-                    <a:bodyPr wrap="square"/>
+                    <a:bodyPr/>
                     <a:lstStyle/>
                     <a:p>
                       <a:pPr algn="l"/>
@@ -7795,7 +7380,7 @@
                       </a:r>
                     </a:p>
                   </a:txBody>
-                  <a:tcPr anchor="ctr" marL="73152" marR="73152">
+                  <a:tcPr marL="73152" marR="73152" anchor="ctr">
                     <a:solidFill>
                       <a:srgbClr val="DBEAFE"/>
                     </a:solidFill>
@@ -7803,7 +7388,7 @@
                 </a:tc>
                 <a:tc>
                   <a:txBody>
-                    <a:bodyPr wrap="square"/>
+                    <a:bodyPr/>
                     <a:lstStyle/>
                     <a:p>
                       <a:pPr algn="ctr"/>
@@ -7818,7 +7403,7 @@
                       </a:r>
                     </a:p>
                   </a:txBody>
-                  <a:tcPr anchor="ctr" marL="73152" marR="73152">
+                  <a:tcPr marL="73152" marR="73152" anchor="ctr">
                     <a:solidFill>
                       <a:srgbClr val="DBEAFE"/>
                     </a:solidFill>
@@ -7826,7 +7411,7 @@
                 </a:tc>
                 <a:tc>
                   <a:txBody>
-                    <a:bodyPr wrap="square"/>
+                    <a:bodyPr/>
                     <a:lstStyle/>
                     <a:p>
                       <a:pPr algn="ctr"/>
@@ -7841,7 +7426,7 @@
                       </a:r>
                     </a:p>
                   </a:txBody>
-                  <a:tcPr anchor="ctr" marL="73152" marR="73152">
+                  <a:tcPr marL="73152" marR="73152" anchor="ctr">
                     <a:solidFill>
                       <a:srgbClr val="DBEAFE"/>
                     </a:solidFill>
@@ -7849,7 +7434,7 @@
                 </a:tc>
                 <a:tc>
                   <a:txBody>
-                    <a:bodyPr wrap="square"/>
+                    <a:bodyPr/>
                     <a:lstStyle/>
                     <a:p>
                       <a:pPr algn="ctr"/>
@@ -7864,7 +7449,7 @@
                       </a:r>
                     </a:p>
                   </a:txBody>
-                  <a:tcPr anchor="ctr" marL="73152" marR="73152">
+                  <a:tcPr marL="73152" marR="73152" anchor="ctr">
                     <a:solidFill>
                       <a:srgbClr val="DBEAFE"/>
                     </a:solidFill>
@@ -7872,7 +7457,7 @@
                 </a:tc>
                 <a:tc>
                   <a:txBody>
-                    <a:bodyPr wrap="square"/>
+                    <a:bodyPr/>
                     <a:lstStyle/>
                     <a:p>
                       <a:pPr algn="ctr"/>
@@ -7887,7 +7472,7 @@
                       </a:r>
                     </a:p>
                   </a:txBody>
-                  <a:tcPr anchor="ctr" marL="73152" marR="73152">
+                  <a:tcPr marL="73152" marR="73152" anchor="ctr">
                     <a:solidFill>
                       <a:srgbClr val="DBEAFE"/>
                     </a:solidFill>
@@ -7895,7 +7480,7 @@
                 </a:tc>
                 <a:tc>
                   <a:txBody>
-                    <a:bodyPr wrap="square"/>
+                    <a:bodyPr/>
                     <a:lstStyle/>
                     <a:p>
                       <a:pPr algn="ctr"/>
@@ -7910,7 +7495,7 @@
                       </a:r>
                     </a:p>
                   </a:txBody>
-                  <a:tcPr anchor="ctr" marL="73152" marR="73152">
+                  <a:tcPr marL="73152" marR="73152" anchor="ctr">
                     <a:solidFill>
                       <a:srgbClr val="DBEAFE"/>
                     </a:solidFill>
@@ -7918,7 +7503,7 @@
                 </a:tc>
                 <a:tc>
                   <a:txBody>
-                    <a:bodyPr wrap="square"/>
+                    <a:bodyPr/>
                     <a:lstStyle/>
                     <a:p>
                       <a:pPr algn="ctr"/>
@@ -7933,12 +7518,17 @@
                       </a:r>
                     </a:p>
                   </a:txBody>
-                  <a:tcPr anchor="ctr" marL="73152" marR="73152">
+                  <a:tcPr marL="73152" marR="73152" anchor="ctr">
                     <a:solidFill>
                       <a:srgbClr val="DBEAFE"/>
                     </a:solidFill>
                   </a:tcPr>
                 </a:tc>
+                <a:extLst>
+                  <a:ext uri="{0D108BD9-81ED-4DB2-BD59-A6C34878D82A}">
+                    <a16:rowId xmlns:a16="http://schemas.microsoft.com/office/drawing/2014/main" val="10004"/>
+                  </a:ext>
+                </a:extLst>
               </a:tr>
             </a:tbl>
           </a:graphicData>
@@ -7953,7 +7543,7 @@
 </file>
 
 <file path=ppt/slides/slide4.xml><?xml version="1.0" encoding="utf-8"?>
-<p:sld xmlns:a="http://schemas.openxmlformats.org/drawingml/2006/main" xmlns:p="http://schemas.openxmlformats.org/presentationml/2006/main" xmlns:r="http://schemas.openxmlformats.org/officeDocument/2006/relationships">
+<p:sld xmlns:a="http://schemas.openxmlformats.org/drawingml/2006/main" xmlns:r="http://schemas.openxmlformats.org/officeDocument/2006/relationships" xmlns:p="http://schemas.openxmlformats.org/presentationml/2006/main">
   <p:cSld>
     <p:spTree>
       <p:nvGrpSpPr>
@@ -7961,7 +7551,14 @@
         <p:cNvGrpSpPr/>
         <p:nvPr/>
       </p:nvGrpSpPr>
-      <p:grpSpPr/>
+      <p:grpSpPr>
+        <a:xfrm>
+          <a:off x="0" y="0"/>
+          <a:ext cx="0" cy="0"/>
+          <a:chOff x="0" y="0"/>
+          <a:chExt cx="0" cy="0"/>
+        </a:xfrm>
+      </p:grpSpPr>
       <p:sp>
         <p:nvSpPr>
           <p:cNvPr id="2" name="Rectangle 1"/>
@@ -8003,6 +7600,7 @@
           <a:lstStyle/>
           <a:p>
             <a:pPr algn="ctr"/>
+            <a:endParaRPr/>
           </a:p>
         </p:txBody>
       </p:sp>
@@ -8023,7 +7621,7 @@
           <a:noFill/>
         </p:spPr>
         <p:txBody>
-          <a:bodyPr wrap="square" lIns="36576" rIns="36576" tIns="18288" bIns="18288" anchor="t">
+          <a:bodyPr wrap="square" lIns="36576" tIns="18288" rIns="36576" bIns="18288" anchor="t">
             <a:spAutoFit/>
           </a:bodyPr>
           <a:lstStyle/>
@@ -8089,7 +7687,7 @@
           </a:fontRef>
         </p:style>
         <p:txBody>
-          <a:bodyPr rtlCol="0" anchor="ctr" wrap="square" lIns="73152" rIns="73152"/>
+          <a:bodyPr wrap="square" lIns="73152" rIns="73152" rtlCol="0" anchor="ctr"/>
           <a:lstStyle/>
           <a:p>
             <a:pPr algn="ctr"/>
@@ -8122,7 +7720,7 @@
           <a:noFill/>
         </p:spPr>
         <p:txBody>
-          <a:bodyPr wrap="square" lIns="36576" rIns="36576" tIns="18288" bIns="18288" anchor="t">
+          <a:bodyPr wrap="square" lIns="36576" tIns="18288" rIns="36576" bIns="18288" anchor="t">
             <a:spAutoFit/>
           </a:bodyPr>
           <a:lstStyle/>
@@ -8188,7 +7786,7 @@
           </a:fontRef>
         </p:style>
         <p:txBody>
-          <a:bodyPr rtlCol="0" anchor="ctr" wrap="square" lIns="73152" rIns="73152"/>
+          <a:bodyPr wrap="square" lIns="73152" rIns="73152" rtlCol="0" anchor="ctr"/>
           <a:lstStyle/>
           <a:p>
             <a:pPr algn="ctr"/>
@@ -8281,7 +7879,7 @@
           </a:fontRef>
         </p:style>
         <p:txBody>
-          <a:bodyPr rtlCol="0" anchor="ctr" wrap="square" lIns="73152" rIns="73152"/>
+          <a:bodyPr wrap="square" lIns="73152" rIns="73152" rtlCol="0" anchor="ctr"/>
           <a:lstStyle/>
           <a:p>
             <a:pPr algn="ctr"/>
@@ -8374,7 +7972,7 @@
           </a:fontRef>
         </p:style>
         <p:txBody>
-          <a:bodyPr rtlCol="0" anchor="ctr" wrap="square" lIns="73152" rIns="73152"/>
+          <a:bodyPr wrap="square" lIns="73152" rIns="73152" rtlCol="0" anchor="ctr"/>
           <a:lstStyle/>
           <a:p>
             <a:pPr algn="ctr"/>
@@ -8467,7 +8065,7 @@
           </a:fontRef>
         </p:style>
         <p:txBody>
-          <a:bodyPr rtlCol="0" anchor="ctr" wrap="square" lIns="73152" rIns="73152"/>
+          <a:bodyPr wrap="square" lIns="73152" rIns="73152" rtlCol="0" anchor="ctr"/>
           <a:lstStyle/>
           <a:p>
             <a:pPr algn="ctr"/>
@@ -8560,7 +8158,7 @@
           </a:fontRef>
         </p:style>
         <p:txBody>
-          <a:bodyPr rtlCol="0" anchor="ctr" wrap="square" lIns="73152" rIns="73152"/>
+          <a:bodyPr wrap="square" lIns="73152" rIns="73152" rtlCol="0" anchor="ctr"/>
           <a:lstStyle/>
           <a:p>
             <a:pPr algn="ctr"/>
@@ -8593,7 +8191,7 @@
           <a:noFill/>
         </p:spPr>
         <p:txBody>
-          <a:bodyPr wrap="square" lIns="36576" rIns="36576" tIns="18288" bIns="18288" anchor="t">
+          <a:bodyPr wrap="square" lIns="36576" tIns="18288" rIns="36576" bIns="18288" anchor="t">
             <a:spAutoFit/>
           </a:bodyPr>
           <a:lstStyle/>
@@ -8695,7 +8293,7 @@
           </a:fontRef>
         </p:style>
         <p:txBody>
-          <a:bodyPr rtlCol="0" anchor="ctr" wrap="square" lIns="73152" rIns="73152"/>
+          <a:bodyPr wrap="square" lIns="73152" rIns="73152" rtlCol="0" anchor="ctr"/>
           <a:lstStyle/>
           <a:p>
             <a:pPr algn="ctr"/>
@@ -8756,6 +8354,7 @@
           <a:lstStyle/>
           <a:p>
             <a:pPr algn="ctr"/>
+            <a:endParaRPr/>
           </a:p>
         </p:txBody>
       </p:sp>
@@ -8776,7 +8375,7 @@
           <a:noFill/>
         </p:spPr>
         <p:txBody>
-          <a:bodyPr wrap="square" lIns="36576" rIns="36576" tIns="18288" bIns="18288" anchor="t">
+          <a:bodyPr wrap="square" lIns="36576" tIns="18288" rIns="36576" bIns="18288" anchor="t">
             <a:spAutoFit/>
           </a:bodyPr>
           <a:lstStyle/>
@@ -8842,7 +8441,7 @@
           </a:fontRef>
         </p:style>
         <p:txBody>
-          <a:bodyPr rtlCol="0" anchor="ctr" wrap="square" lIns="73152" rIns="73152"/>
+          <a:bodyPr wrap="square" lIns="73152" rIns="73152" rtlCol="0" anchor="ctr"/>
           <a:lstStyle/>
           <a:p>
             <a:pPr algn="ctr"/>
@@ -8899,7 +8498,7 @@
           </a:fontRef>
         </p:style>
         <p:txBody>
-          <a:bodyPr rtlCol="0" anchor="ctr" wrap="square" lIns="73152" rIns="73152"/>
+          <a:bodyPr wrap="square" lIns="73152" rIns="73152" rtlCol="0" anchor="ctr"/>
           <a:lstStyle/>
           <a:p>
             <a:pPr algn="ctr"/>
@@ -8956,7 +8555,7 @@
           </a:fontRef>
         </p:style>
         <p:txBody>
-          <a:bodyPr rtlCol="0" anchor="ctr" wrap="square" lIns="73152" rIns="73152"/>
+          <a:bodyPr wrap="square" lIns="73152" rIns="73152" rtlCol="0" anchor="ctr"/>
           <a:lstStyle/>
           <a:p>
             <a:pPr algn="ctr"/>
@@ -9013,7 +8612,7 @@
           </a:fontRef>
         </p:style>
         <p:txBody>
-          <a:bodyPr rtlCol="0" anchor="ctr" wrap="square" lIns="73152" rIns="73152"/>
+          <a:bodyPr wrap="square" lIns="73152" rIns="73152" rtlCol="0" anchor="ctr"/>
           <a:lstStyle/>
           <a:p>
             <a:pPr algn="ctr"/>
@@ -9106,7 +8705,7 @@
           </a:fontRef>
         </p:style>
         <p:txBody>
-          <a:bodyPr rtlCol="0" anchor="ctr" wrap="square" lIns="73152" rIns="73152"/>
+          <a:bodyPr wrap="square" lIns="73152" rIns="73152" rtlCol="0" anchor="ctr"/>
           <a:lstStyle/>
           <a:p>
             <a:pPr algn="ctr"/>
@@ -9163,7 +8762,7 @@
           </a:fontRef>
         </p:style>
         <p:txBody>
-          <a:bodyPr rtlCol="0" anchor="ctr" wrap="square" lIns="73152" rIns="73152"/>
+          <a:bodyPr wrap="square" lIns="73152" rIns="73152" rtlCol="0" anchor="ctr"/>
           <a:lstStyle/>
           <a:p>
             <a:pPr algn="ctr"/>
@@ -9292,7 +8891,7 @@
           </a:fontRef>
         </p:style>
         <p:txBody>
-          <a:bodyPr rtlCol="0" anchor="ctr" wrap="square" lIns="73152" rIns="73152"/>
+          <a:bodyPr wrap="square" lIns="73152" rIns="73152" rtlCol="0" anchor="ctr"/>
           <a:lstStyle/>
           <a:p>
             <a:pPr algn="ctr"/>
@@ -9383,7 +8982,7 @@
           </a:fontRef>
         </p:style>
         <p:txBody>
-          <a:bodyPr rtlCol="0" anchor="ctr" lIns="0" rIns="0" tIns="0" bIns="0"/>
+          <a:bodyPr lIns="0" tIns="0" rIns="0" bIns="0" rtlCol="0" anchor="ctr"/>
           <a:lstStyle/>
           <a:p>
             <a:pPr algn="ctr"/>
@@ -9438,7 +9037,7 @@
           </a:fontRef>
         </p:style>
         <p:txBody>
-          <a:bodyPr rtlCol="0" anchor="ctr" lIns="0" rIns="0" tIns="0" bIns="0"/>
+          <a:bodyPr lIns="0" tIns="0" rIns="0" bIns="0" rtlCol="0" anchor="ctr"/>
           <a:lstStyle/>
           <a:p>
             <a:pPr algn="ctr"/>
@@ -9493,7 +9092,7 @@
           </a:fontRef>
         </p:style>
         <p:txBody>
-          <a:bodyPr rtlCol="0" anchor="ctr" lIns="0" rIns="0" tIns="0" bIns="0"/>
+          <a:bodyPr lIns="0" tIns="0" rIns="0" bIns="0" rtlCol="0" anchor="ctr"/>
           <a:lstStyle/>
           <a:p>
             <a:pPr algn="ctr"/>
@@ -9552,6 +9151,7 @@
           <a:lstStyle/>
           <a:p>
             <a:pPr algn="ctr"/>
+            <a:endParaRPr/>
           </a:p>
         </p:txBody>
       </p:sp>
@@ -9572,7 +9172,7 @@
           <a:noFill/>
         </p:spPr>
         <p:txBody>
-          <a:bodyPr wrap="square" lIns="36576" rIns="36576" tIns="18288" bIns="18288" anchor="t">
+          <a:bodyPr wrap="square" lIns="36576" tIns="18288" rIns="36576" bIns="18288" anchor="t">
             <a:spAutoFit/>
           </a:bodyPr>
           <a:lstStyle/>
@@ -9614,7 +9214,7 @@
           <a:noFill/>
         </p:spPr>
         <p:txBody>
-          <a:bodyPr wrap="square" lIns="36576" rIns="36576" tIns="18288" bIns="18288" anchor="t">
+          <a:bodyPr wrap="square" lIns="36576" tIns="18288" rIns="36576" bIns="18288" anchor="t">
             <a:spAutoFit/>
           </a:bodyPr>
           <a:lstStyle/>
@@ -9656,7 +9256,7 @@
           <a:noFill/>
         </p:spPr>
         <p:txBody>
-          <a:bodyPr wrap="square" lIns="36576" rIns="36576" tIns="18288" bIns="18288" anchor="t">
+          <a:bodyPr wrap="square" lIns="36576" tIns="18288" rIns="36576" bIns="18288" anchor="t">
             <a:spAutoFit/>
           </a:bodyPr>
           <a:lstStyle/>
@@ -9698,7 +9298,7 @@
           <a:noFill/>
         </p:spPr>
         <p:txBody>
-          <a:bodyPr wrap="square" lIns="36576" rIns="36576" tIns="18288" bIns="18288" anchor="t">
+          <a:bodyPr wrap="square" lIns="36576" tIns="18288" rIns="36576" bIns="18288" anchor="t">
             <a:spAutoFit/>
           </a:bodyPr>
           <a:lstStyle/>
@@ -9740,7 +9340,7 @@
           <a:noFill/>
         </p:spPr>
         <p:txBody>
-          <a:bodyPr wrap="square" lIns="36576" rIns="36576" tIns="18288" bIns="18288" anchor="t">
+          <a:bodyPr wrap="square" lIns="36576" tIns="18288" rIns="36576" bIns="18288" anchor="t">
             <a:spAutoFit/>
           </a:bodyPr>
           <a:lstStyle/>
@@ -9782,7 +9382,7 @@
           <a:noFill/>
         </p:spPr>
         <p:txBody>
-          <a:bodyPr wrap="square" lIns="36576" rIns="36576" tIns="18288" bIns="18288" anchor="t">
+          <a:bodyPr wrap="square" lIns="36576" tIns="18288" rIns="36576" bIns="18288" anchor="t">
             <a:spAutoFit/>
           </a:bodyPr>
           <a:lstStyle/>
@@ -9824,7 +9424,7 @@
           <a:noFill/>
         </p:spPr>
         <p:txBody>
-          <a:bodyPr wrap="square" lIns="36576" rIns="36576" tIns="18288" bIns="18288" anchor="t">
+          <a:bodyPr wrap="square" lIns="36576" tIns="18288" rIns="36576" bIns="18288" anchor="t">
             <a:spAutoFit/>
           </a:bodyPr>
           <a:lstStyle/>
@@ -9892,6 +9492,7 @@
           <a:lstStyle/>
           <a:p>
             <a:pPr algn="ctr"/>
+            <a:endParaRPr/>
           </a:p>
         </p:txBody>
       </p:sp>
@@ -9912,7 +9513,7 @@
           <a:noFill/>
         </p:spPr>
         <p:txBody>
-          <a:bodyPr wrap="square" lIns="36576" rIns="36576" tIns="18288" bIns="18288" anchor="t">
+          <a:bodyPr wrap="square" lIns="36576" tIns="18288" rIns="36576" bIns="18288" anchor="t">
             <a:spAutoFit/>
           </a:bodyPr>
           <a:lstStyle/>
@@ -9982,6 +9583,7 @@
           <a:lstStyle/>
           <a:p>
             <a:pPr algn="ctr"/>
+            <a:endParaRPr/>
           </a:p>
         </p:txBody>
       </p:sp>
@@ -10002,7 +9604,7 @@
           <a:noFill/>
         </p:spPr>
         <p:txBody>
-          <a:bodyPr wrap="square" lIns="36576" rIns="36576" tIns="18288" bIns="18288" anchor="t">
+          <a:bodyPr wrap="square" lIns="36576" tIns="18288" rIns="36576" bIns="18288" anchor="t">
             <a:spAutoFit/>
           </a:bodyPr>
           <a:lstStyle/>
@@ -10036,7 +9638,7 @@
 </file>
 
 <file path=ppt/slides/slide5.xml><?xml version="1.0" encoding="utf-8"?>
-<p:sld xmlns:a="http://schemas.openxmlformats.org/drawingml/2006/main" xmlns:p="http://schemas.openxmlformats.org/presentationml/2006/main" xmlns:r="http://schemas.openxmlformats.org/officeDocument/2006/relationships">
+<p:sld xmlns:a="http://schemas.openxmlformats.org/drawingml/2006/main" xmlns:r="http://schemas.openxmlformats.org/officeDocument/2006/relationships" xmlns:p="http://schemas.openxmlformats.org/presentationml/2006/main">
   <p:cSld>
     <p:spTree>
       <p:nvGrpSpPr>
@@ -10044,7 +9646,14 @@
         <p:cNvGrpSpPr/>
         <p:nvPr/>
       </p:nvGrpSpPr>
-      <p:grpSpPr/>
+      <p:grpSpPr>
+        <a:xfrm>
+          <a:off x="0" y="0"/>
+          <a:ext cx="0" cy="0"/>
+          <a:chOff x="0" y="0"/>
+          <a:chExt cx="0" cy="0"/>
+        </a:xfrm>
+      </p:grpSpPr>
       <p:sp>
         <p:nvSpPr>
           <p:cNvPr id="2" name="Rectangle 1"/>
@@ -10086,6 +9695,7 @@
           <a:lstStyle/>
           <a:p>
             <a:pPr algn="ctr"/>
+            <a:endParaRPr/>
           </a:p>
         </p:txBody>
       </p:sp>
@@ -10106,7 +9716,7 @@
           <a:noFill/>
         </p:spPr>
         <p:txBody>
-          <a:bodyPr wrap="square" lIns="36576" rIns="36576" tIns="18288" bIns="18288" anchor="t">
+          <a:bodyPr wrap="square" lIns="36576" tIns="18288" rIns="36576" bIns="18288" anchor="t">
             <a:spAutoFit/>
           </a:bodyPr>
           <a:lstStyle/>
@@ -10172,7 +9782,7 @@
           </a:fontRef>
         </p:style>
         <p:txBody>
-          <a:bodyPr rtlCol="0" anchor="ctr" wrap="square" lIns="73152" rIns="73152"/>
+          <a:bodyPr wrap="square" lIns="73152" rIns="73152" rtlCol="0" anchor="ctr"/>
           <a:lstStyle/>
           <a:p>
             <a:pPr algn="ctr"/>
@@ -10205,7 +9815,7 @@
           <a:noFill/>
         </p:spPr>
         <p:txBody>
-          <a:bodyPr wrap="square" lIns="36576" rIns="36576" tIns="18288" bIns="18288" anchor="t">
+          <a:bodyPr wrap="square" lIns="36576" tIns="18288" rIns="36576" bIns="18288" anchor="t">
             <a:spAutoFit/>
           </a:bodyPr>
           <a:lstStyle/>
@@ -10275,6 +9885,7 @@
           <a:lstStyle/>
           <a:p>
             <a:pPr algn="ctr"/>
+            <a:endParaRPr/>
           </a:p>
         </p:txBody>
       </p:sp>
@@ -10295,7 +9906,7 @@
           <a:noFill/>
         </p:spPr>
         <p:txBody>
-          <a:bodyPr wrap="square" lIns="36576" rIns="36576" tIns="18288" bIns="18288" anchor="t">
+          <a:bodyPr wrap="square" lIns="36576" tIns="18288" rIns="36576" bIns="18288" anchor="t">
             <a:spAutoFit/>
           </a:bodyPr>
           <a:lstStyle/>
@@ -10337,7 +9948,7 @@
           <a:noFill/>
         </p:spPr>
         <p:txBody>
-          <a:bodyPr wrap="square" lIns="36576" rIns="36576" tIns="18288" bIns="18288" anchor="t">
+          <a:bodyPr wrap="square" lIns="36576" tIns="18288" rIns="36576" bIns="18288" anchor="t">
             <a:spAutoFit/>
           </a:bodyPr>
           <a:lstStyle/>
@@ -10379,7 +9990,7 @@
           <a:noFill/>
         </p:spPr>
         <p:txBody>
-          <a:bodyPr wrap="square" lIns="36576" rIns="36576" tIns="18288" bIns="18288" anchor="t">
+          <a:bodyPr wrap="square" lIns="36576" tIns="18288" rIns="36576" bIns="18288" anchor="t">
             <a:spAutoFit/>
           </a:bodyPr>
           <a:lstStyle/>
@@ -10449,6 +10060,7 @@
           <a:lstStyle/>
           <a:p>
             <a:pPr algn="ctr"/>
+            <a:endParaRPr/>
           </a:p>
         </p:txBody>
       </p:sp>
@@ -10469,7 +10081,7 @@
           <a:noFill/>
         </p:spPr>
         <p:txBody>
-          <a:bodyPr wrap="square" lIns="36576" rIns="36576" tIns="18288" bIns="18288" anchor="t">
+          <a:bodyPr wrap="square" lIns="36576" tIns="18288" rIns="36576" bIns="18288" anchor="t">
             <a:spAutoFit/>
           </a:bodyPr>
           <a:lstStyle/>
@@ -10511,7 +10123,7 @@
           <a:noFill/>
         </p:spPr>
         <p:txBody>
-          <a:bodyPr wrap="square" lIns="36576" rIns="36576" tIns="18288" bIns="18288" anchor="t">
+          <a:bodyPr wrap="square" lIns="36576" tIns="18288" rIns="36576" bIns="18288" anchor="t">
             <a:spAutoFit/>
           </a:bodyPr>
           <a:lstStyle/>
@@ -10553,7 +10165,7 @@
           <a:noFill/>
         </p:spPr>
         <p:txBody>
-          <a:bodyPr wrap="square" lIns="36576" rIns="36576" tIns="18288" bIns="18288" anchor="t">
+          <a:bodyPr wrap="square" lIns="36576" tIns="18288" rIns="36576" bIns="18288" anchor="t">
             <a:spAutoFit/>
           </a:bodyPr>
           <a:lstStyle/>
@@ -10623,6 +10235,7 @@
           <a:lstStyle/>
           <a:p>
             <a:pPr algn="ctr"/>
+            <a:endParaRPr/>
           </a:p>
         </p:txBody>
       </p:sp>
@@ -10643,7 +10256,7 @@
           <a:noFill/>
         </p:spPr>
         <p:txBody>
-          <a:bodyPr wrap="square" lIns="36576" rIns="36576" tIns="18288" bIns="18288" anchor="t">
+          <a:bodyPr wrap="square" lIns="36576" tIns="18288" rIns="36576" bIns="18288" anchor="t">
             <a:spAutoFit/>
           </a:bodyPr>
           <a:lstStyle/>
@@ -10685,7 +10298,7 @@
           <a:noFill/>
         </p:spPr>
         <p:txBody>
-          <a:bodyPr wrap="square" lIns="36576" rIns="36576" tIns="18288" bIns="18288" anchor="t">
+          <a:bodyPr wrap="square" lIns="36576" tIns="18288" rIns="36576" bIns="18288" anchor="t">
             <a:spAutoFit/>
           </a:bodyPr>
           <a:lstStyle/>
@@ -10727,7 +10340,7 @@
           <a:noFill/>
         </p:spPr>
         <p:txBody>
-          <a:bodyPr wrap="square" lIns="36576" rIns="36576" tIns="18288" bIns="18288" anchor="t">
+          <a:bodyPr wrap="square" lIns="36576" tIns="18288" rIns="36576" bIns="18288" anchor="t">
             <a:spAutoFit/>
           </a:bodyPr>
           <a:lstStyle/>
@@ -10797,6 +10410,7 @@
           <a:lstStyle/>
           <a:p>
             <a:pPr algn="ctr"/>
+            <a:endParaRPr/>
           </a:p>
         </p:txBody>
       </p:sp>
@@ -10817,7 +10431,7 @@
           <a:noFill/>
         </p:spPr>
         <p:txBody>
-          <a:bodyPr wrap="square" lIns="36576" rIns="36576" tIns="18288" bIns="18288" anchor="t">
+          <a:bodyPr wrap="square" lIns="36576" tIns="18288" rIns="36576" bIns="18288" anchor="t">
             <a:spAutoFit/>
           </a:bodyPr>
           <a:lstStyle/>
@@ -10859,7 +10473,7 @@
           <a:noFill/>
         </p:spPr>
         <p:txBody>
-          <a:bodyPr wrap="square" lIns="36576" rIns="36576" tIns="18288" bIns="18288" anchor="t">
+          <a:bodyPr wrap="square" lIns="36576" tIns="18288" rIns="36576" bIns="18288" anchor="t">
             <a:spAutoFit/>
           </a:bodyPr>
           <a:lstStyle/>
@@ -10901,7 +10515,7 @@
           <a:noFill/>
         </p:spPr>
         <p:txBody>
-          <a:bodyPr wrap="square" lIns="36576" rIns="36576" tIns="18288" bIns="18288" anchor="t">
+          <a:bodyPr wrap="square" lIns="36576" tIns="18288" rIns="36576" bIns="18288" anchor="t">
             <a:spAutoFit/>
           </a:bodyPr>
           <a:lstStyle/>
@@ -10971,6 +10585,7 @@
           <a:lstStyle/>
           <a:p>
             <a:pPr algn="ctr"/>
+            <a:endParaRPr/>
           </a:p>
         </p:txBody>
       </p:sp>
@@ -10991,7 +10606,7 @@
           <a:noFill/>
         </p:spPr>
         <p:txBody>
-          <a:bodyPr wrap="square" lIns="36576" rIns="36576" tIns="18288" bIns="18288" anchor="t">
+          <a:bodyPr wrap="square" lIns="36576" tIns="18288" rIns="36576" bIns="18288" anchor="t">
             <a:spAutoFit/>
           </a:bodyPr>
           <a:lstStyle/>
@@ -11033,7 +10648,7 @@
           <a:noFill/>
         </p:spPr>
         <p:txBody>
-          <a:bodyPr wrap="square" lIns="36576" rIns="36576" tIns="18288" bIns="18288" anchor="t">
+          <a:bodyPr wrap="square" lIns="36576" tIns="18288" rIns="36576" bIns="18288" anchor="t">
             <a:spAutoFit/>
           </a:bodyPr>
           <a:lstStyle/>
@@ -11101,6 +10716,7 @@
           <a:lstStyle/>
           <a:p>
             <a:pPr algn="ctr"/>
+            <a:endParaRPr/>
           </a:p>
         </p:txBody>
       </p:sp>
@@ -11121,7 +10737,7 @@
           <a:noFill/>
         </p:spPr>
         <p:txBody>
-          <a:bodyPr wrap="square" lIns="36576" rIns="36576" tIns="18288" bIns="18288" anchor="t">
+          <a:bodyPr wrap="square" lIns="36576" tIns="18288" rIns="36576" bIns="18288" anchor="t">
             <a:spAutoFit/>
           </a:bodyPr>
           <a:lstStyle/>
@@ -11163,7 +10779,7 @@
           <a:noFill/>
         </p:spPr>
         <p:txBody>
-          <a:bodyPr wrap="square" lIns="36576" rIns="36576" tIns="18288" bIns="18288" anchor="t">
+          <a:bodyPr wrap="square" lIns="36576" tIns="18288" rIns="36576" bIns="18288" anchor="t">
             <a:spAutoFit/>
           </a:bodyPr>
           <a:lstStyle/>
@@ -11197,7 +10813,7 @@
 </file>
 
 <file path=ppt/slides/slide6.xml><?xml version="1.0" encoding="utf-8"?>
-<p:sld xmlns:a="http://schemas.openxmlformats.org/drawingml/2006/main" xmlns:p="http://schemas.openxmlformats.org/presentationml/2006/main" xmlns:r="http://schemas.openxmlformats.org/officeDocument/2006/relationships">
+<p:sld xmlns:a="http://schemas.openxmlformats.org/drawingml/2006/main" xmlns:r="http://schemas.openxmlformats.org/officeDocument/2006/relationships" xmlns:p="http://schemas.openxmlformats.org/presentationml/2006/main">
   <p:cSld>
     <p:spTree>
       <p:nvGrpSpPr>
@@ -11205,7 +10821,14 @@
         <p:cNvGrpSpPr/>
         <p:nvPr/>
       </p:nvGrpSpPr>
-      <p:grpSpPr/>
+      <p:grpSpPr>
+        <a:xfrm>
+          <a:off x="0" y="0"/>
+          <a:ext cx="0" cy="0"/>
+          <a:chOff x="0" y="0"/>
+          <a:chExt cx="0" cy="0"/>
+        </a:xfrm>
+      </p:grpSpPr>
       <p:sp>
         <p:nvSpPr>
           <p:cNvPr id="2" name="Rectangle 1"/>
@@ -11247,6 +10870,7 @@
           <a:lstStyle/>
           <a:p>
             <a:pPr algn="ctr"/>
+            <a:endParaRPr/>
           </a:p>
         </p:txBody>
       </p:sp>
@@ -11267,7 +10891,7 @@
           <a:noFill/>
         </p:spPr>
         <p:txBody>
-          <a:bodyPr wrap="square" lIns="36576" rIns="36576" tIns="18288" bIns="18288" anchor="t">
+          <a:bodyPr wrap="square" lIns="36576" tIns="18288" rIns="36576" bIns="18288" anchor="t">
             <a:spAutoFit/>
           </a:bodyPr>
           <a:lstStyle/>
@@ -11333,7 +10957,7 @@
           </a:fontRef>
         </p:style>
         <p:txBody>
-          <a:bodyPr rtlCol="0" anchor="ctr" wrap="square" lIns="73152" rIns="73152"/>
+          <a:bodyPr wrap="square" lIns="73152" rIns="73152" rtlCol="0" anchor="ctr"/>
           <a:lstStyle/>
           <a:p>
             <a:pPr algn="ctr"/>
@@ -11366,7 +10990,7 @@
           <a:noFill/>
         </p:spPr>
         <p:txBody>
-          <a:bodyPr wrap="square" lIns="36576" rIns="36576" tIns="18288" bIns="18288" anchor="t">
+          <a:bodyPr wrap="square" lIns="36576" tIns="18288" rIns="36576" bIns="18288" anchor="t">
             <a:spAutoFit/>
           </a:bodyPr>
           <a:lstStyle/>
@@ -11405,7 +11029,7 @@
         </p:xfrm>
         <a:graphic>
           <a:graphicData uri="http://schemas.openxmlformats.org/drawingml/2006/chart">
-            <c:chart xmlns:c="http://schemas.openxmlformats.org/drawingml/2006/chart" r:id="rId3"/>
+            <c:chart xmlns:c="http://schemas.openxmlformats.org/drawingml/2006/chart" xmlns:r="http://schemas.openxmlformats.org/officeDocument/2006/relationships" r:id="rId3"/>
           </a:graphicData>
         </a:graphic>
       </p:graphicFrame>
@@ -11426,7 +11050,7 @@
           <a:noFill/>
         </p:spPr>
         <p:txBody>
-          <a:bodyPr wrap="square" lIns="36576" rIns="36576" tIns="18288" bIns="18288" anchor="t">
+          <a:bodyPr wrap="square" lIns="36576" tIns="18288" rIns="36576" bIns="18288" anchor="t">
             <a:spAutoFit/>
           </a:bodyPr>
           <a:lstStyle/>
@@ -11468,7 +11092,7 @@
           <a:noFill/>
         </p:spPr>
         <p:txBody>
-          <a:bodyPr wrap="square" lIns="36576" rIns="36576" tIns="18288" bIns="18288" anchor="t">
+          <a:bodyPr wrap="square" lIns="36576" tIns="18288" rIns="36576" bIns="18288" anchor="t">
             <a:spAutoFit/>
           </a:bodyPr>
           <a:lstStyle/>
@@ -11510,7 +11134,7 @@
           <a:noFill/>
         </p:spPr>
         <p:txBody>
-          <a:bodyPr wrap="square" lIns="36576" rIns="36576" tIns="18288" bIns="18288" anchor="t">
+          <a:bodyPr wrap="square" lIns="36576" tIns="18288" rIns="36576" bIns="18288" anchor="t">
             <a:spAutoFit/>
           </a:bodyPr>
           <a:lstStyle/>
@@ -11552,7 +11176,7 @@
           <a:noFill/>
         </p:spPr>
         <p:txBody>
-          <a:bodyPr wrap="square" lIns="36576" rIns="36576" tIns="18288" bIns="18288" anchor="t">
+          <a:bodyPr wrap="square" lIns="36576" tIns="18288" rIns="36576" bIns="18288" anchor="t">
             <a:spAutoFit/>
           </a:bodyPr>
           <a:lstStyle/>
@@ -11594,7 +11218,7 @@
           <a:noFill/>
         </p:spPr>
         <p:txBody>
-          <a:bodyPr wrap="square" lIns="36576" rIns="36576" tIns="18288" bIns="18288" anchor="t">
+          <a:bodyPr wrap="square" lIns="36576" tIns="18288" rIns="36576" bIns="18288" anchor="t">
             <a:spAutoFit/>
           </a:bodyPr>
           <a:lstStyle/>
@@ -11636,7 +11260,7 @@
           <a:noFill/>
         </p:spPr>
         <p:txBody>
-          <a:bodyPr wrap="square" lIns="36576" rIns="36576" tIns="18288" bIns="18288" anchor="t">
+          <a:bodyPr wrap="square" lIns="36576" tIns="18288" rIns="36576" bIns="18288" anchor="t">
             <a:spAutoFit/>
           </a:bodyPr>
           <a:lstStyle/>
@@ -11678,7 +11302,7 @@
           <a:noFill/>
         </p:spPr>
         <p:txBody>
-          <a:bodyPr wrap="square" lIns="36576" rIns="36576" tIns="18288" bIns="18288" anchor="t">
+          <a:bodyPr wrap="square" lIns="36576" tIns="18288" rIns="36576" bIns="18288" anchor="t">
             <a:spAutoFit/>
           </a:bodyPr>
           <a:lstStyle/>
@@ -11720,7 +11344,7 @@
           <a:noFill/>
         </p:spPr>
         <p:txBody>
-          <a:bodyPr wrap="square" lIns="36576" rIns="36576" tIns="18288" bIns="18288" anchor="t">
+          <a:bodyPr wrap="square" lIns="36576" tIns="18288" rIns="36576" bIns="18288" anchor="t">
             <a:spAutoFit/>
           </a:bodyPr>
           <a:lstStyle/>
@@ -11762,7 +11386,7 @@
           <a:noFill/>
         </p:spPr>
         <p:txBody>
-          <a:bodyPr wrap="square" lIns="36576" rIns="36576" tIns="18288" bIns="18288" anchor="t">
+          <a:bodyPr wrap="square" lIns="36576" tIns="18288" rIns="36576" bIns="18288" anchor="t">
             <a:spAutoFit/>
           </a:bodyPr>
           <a:lstStyle/>
@@ -11804,7 +11428,7 @@
           <a:noFill/>
         </p:spPr>
         <p:txBody>
-          <a:bodyPr wrap="square" lIns="36576" rIns="36576" tIns="18288" bIns="18288" anchor="t">
+          <a:bodyPr wrap="square" lIns="36576" tIns="18288" rIns="36576" bIns="18288" anchor="t">
             <a:spAutoFit/>
           </a:bodyPr>
           <a:lstStyle/>
@@ -11857,7 +11481,7 @@
 </file>
 
 <file path=ppt/slides/slide7.xml><?xml version="1.0" encoding="utf-8"?>
-<p:sld xmlns:a="http://schemas.openxmlformats.org/drawingml/2006/main" xmlns:p="http://schemas.openxmlformats.org/presentationml/2006/main" xmlns:r="http://schemas.openxmlformats.org/officeDocument/2006/relationships">
+<p:sld xmlns:a="http://schemas.openxmlformats.org/drawingml/2006/main" xmlns:r="http://schemas.openxmlformats.org/officeDocument/2006/relationships" xmlns:p="http://schemas.openxmlformats.org/presentationml/2006/main">
   <p:cSld>
     <p:spTree>
       <p:nvGrpSpPr>
@@ -11865,7 +11489,14 @@
         <p:cNvGrpSpPr/>
         <p:nvPr/>
       </p:nvGrpSpPr>
-      <p:grpSpPr/>
+      <p:grpSpPr>
+        <a:xfrm>
+          <a:off x="0" y="0"/>
+          <a:ext cx="0" cy="0"/>
+          <a:chOff x="0" y="0"/>
+          <a:chExt cx="0" cy="0"/>
+        </a:xfrm>
+      </p:grpSpPr>
       <p:sp>
         <p:nvSpPr>
           <p:cNvPr id="2" name="Rectangle 1"/>
@@ -11907,6 +11538,7 @@
           <a:lstStyle/>
           <a:p>
             <a:pPr algn="ctr"/>
+            <a:endParaRPr/>
           </a:p>
         </p:txBody>
       </p:sp>
@@ -11927,7 +11559,7 @@
           <a:noFill/>
         </p:spPr>
         <p:txBody>
-          <a:bodyPr wrap="square" lIns="36576" rIns="36576" tIns="18288" bIns="18288" anchor="t">
+          <a:bodyPr wrap="square" lIns="36576" tIns="18288" rIns="36576" bIns="18288" anchor="t">
             <a:spAutoFit/>
           </a:bodyPr>
           <a:lstStyle/>
@@ -11993,7 +11625,7 @@
           </a:fontRef>
         </p:style>
         <p:txBody>
-          <a:bodyPr rtlCol="0" anchor="ctr" wrap="square" lIns="73152" rIns="73152"/>
+          <a:bodyPr wrap="square" lIns="73152" rIns="73152" rtlCol="0" anchor="ctr"/>
           <a:lstStyle/>
           <a:p>
             <a:pPr algn="ctr"/>
@@ -12026,7 +11658,7 @@
           <a:noFill/>
         </p:spPr>
         <p:txBody>
-          <a:bodyPr wrap="square" lIns="36576" rIns="36576" tIns="18288" bIns="18288" anchor="t">
+          <a:bodyPr wrap="square" lIns="36576" tIns="18288" rIns="36576" bIns="18288" anchor="t">
             <a:spAutoFit/>
           </a:bodyPr>
           <a:lstStyle/>
@@ -12065,7 +11697,7 @@
         </p:xfrm>
         <a:graphic>
           <a:graphicData uri="http://schemas.openxmlformats.org/drawingml/2006/chart">
-            <c:chart xmlns:c="http://schemas.openxmlformats.org/drawingml/2006/chart" r:id="rId3"/>
+            <c:chart xmlns:c="http://schemas.openxmlformats.org/drawingml/2006/chart" xmlns:r="http://schemas.openxmlformats.org/officeDocument/2006/relationships" r:id="rId3"/>
           </a:graphicData>
         </a:graphic>
       </p:graphicFrame>
@@ -12112,6 +11744,7 @@
           <a:lstStyle/>
           <a:p>
             <a:pPr algn="ctr"/>
+            <a:endParaRPr/>
           </a:p>
         </p:txBody>
       </p:sp>
@@ -12132,7 +11765,7 @@
           <a:noFill/>
         </p:spPr>
         <p:txBody>
-          <a:bodyPr wrap="square" lIns="36576" rIns="36576" tIns="18288" bIns="18288" anchor="t">
+          <a:bodyPr wrap="square" lIns="36576" tIns="18288" rIns="36576" bIns="18288" anchor="t">
             <a:spAutoFit/>
           </a:bodyPr>
           <a:lstStyle/>
@@ -12174,7 +11807,7 @@
           <a:noFill/>
         </p:spPr>
         <p:txBody>
-          <a:bodyPr wrap="square" lIns="36576" rIns="36576" tIns="18288" bIns="18288" anchor="t">
+          <a:bodyPr wrap="square" lIns="36576" tIns="18288" rIns="36576" bIns="18288" anchor="t">
             <a:spAutoFit/>
           </a:bodyPr>
           <a:lstStyle/>
@@ -12242,6 +11875,7 @@
           <a:lstStyle/>
           <a:p>
             <a:pPr algn="ctr"/>
+            <a:endParaRPr/>
           </a:p>
         </p:txBody>
       </p:sp>
@@ -12262,7 +11896,7 @@
           <a:noFill/>
         </p:spPr>
         <p:txBody>
-          <a:bodyPr wrap="square" lIns="36576" rIns="36576" tIns="18288" bIns="18288" anchor="t">
+          <a:bodyPr wrap="square" lIns="36576" tIns="18288" rIns="36576" bIns="18288" anchor="t">
             <a:spAutoFit/>
           </a:bodyPr>
           <a:lstStyle/>
@@ -12304,7 +11938,7 @@
           <a:noFill/>
         </p:spPr>
         <p:txBody>
-          <a:bodyPr wrap="square" lIns="36576" rIns="36576" tIns="18288" bIns="18288" anchor="t">
+          <a:bodyPr wrap="square" lIns="36576" tIns="18288" rIns="36576" bIns="18288" anchor="t">
             <a:spAutoFit/>
           </a:bodyPr>
           <a:lstStyle/>
@@ -12372,6 +12006,7 @@
           <a:lstStyle/>
           <a:p>
             <a:pPr algn="ctr"/>
+            <a:endParaRPr/>
           </a:p>
         </p:txBody>
       </p:sp>
@@ -12392,7 +12027,7 @@
           <a:noFill/>
         </p:spPr>
         <p:txBody>
-          <a:bodyPr wrap="square" lIns="36576" rIns="36576" tIns="18288" bIns="18288" anchor="t">
+          <a:bodyPr wrap="square" lIns="36576" tIns="18288" rIns="36576" bIns="18288" anchor="t">
             <a:spAutoFit/>
           </a:bodyPr>
           <a:lstStyle/>
@@ -12434,7 +12069,7 @@
           <a:noFill/>
         </p:spPr>
         <p:txBody>
-          <a:bodyPr wrap="square" lIns="36576" rIns="36576" tIns="18288" bIns="18288" anchor="t">
+          <a:bodyPr wrap="square" lIns="36576" tIns="18288" rIns="36576" bIns="18288" anchor="t">
             <a:spAutoFit/>
           </a:bodyPr>
           <a:lstStyle/>
@@ -12502,6 +12137,7 @@
           <a:lstStyle/>
           <a:p>
             <a:pPr algn="ctr"/>
+            <a:endParaRPr/>
           </a:p>
         </p:txBody>
       </p:sp>
@@ -12522,7 +12158,7 @@
           <a:noFill/>
         </p:spPr>
         <p:txBody>
-          <a:bodyPr wrap="square" lIns="36576" rIns="36576" tIns="18288" bIns="18288" anchor="t">
+          <a:bodyPr wrap="square" lIns="36576" tIns="18288" rIns="36576" bIns="18288" anchor="t">
             <a:spAutoFit/>
           </a:bodyPr>
           <a:lstStyle/>
@@ -12564,7 +12200,7 @@
           <a:noFill/>
         </p:spPr>
         <p:txBody>
-          <a:bodyPr wrap="square" lIns="36576" rIns="36576" tIns="18288" bIns="18288" anchor="t">
+          <a:bodyPr wrap="square" lIns="36576" tIns="18288" rIns="36576" bIns="18288" anchor="t">
             <a:spAutoFit/>
           </a:bodyPr>
           <a:lstStyle/>
@@ -12598,7 +12234,7 @@
 </file>
 
 <file path=ppt/slides/slide8.xml><?xml version="1.0" encoding="utf-8"?>
-<p:sld xmlns:a="http://schemas.openxmlformats.org/drawingml/2006/main" xmlns:p="http://schemas.openxmlformats.org/presentationml/2006/main" xmlns:r="http://schemas.openxmlformats.org/officeDocument/2006/relationships">
+<p:sld xmlns:a="http://schemas.openxmlformats.org/drawingml/2006/main" xmlns:r="http://schemas.openxmlformats.org/officeDocument/2006/relationships" xmlns:p="http://schemas.openxmlformats.org/presentationml/2006/main">
   <p:cSld>
     <p:spTree>
       <p:nvGrpSpPr>
@@ -12606,7 +12242,14 @@
         <p:cNvGrpSpPr/>
         <p:nvPr/>
       </p:nvGrpSpPr>
-      <p:grpSpPr/>
+      <p:grpSpPr>
+        <a:xfrm>
+          <a:off x="0" y="0"/>
+          <a:ext cx="0" cy="0"/>
+          <a:chOff x="0" y="0"/>
+          <a:chExt cx="0" cy="0"/>
+        </a:xfrm>
+      </p:grpSpPr>
       <p:sp>
         <p:nvSpPr>
           <p:cNvPr id="2" name="Rectangle 1"/>
@@ -12648,6 +12291,7 @@
           <a:lstStyle/>
           <a:p>
             <a:pPr algn="ctr"/>
+            <a:endParaRPr/>
           </a:p>
         </p:txBody>
       </p:sp>
@@ -12668,7 +12312,7 @@
           <a:noFill/>
         </p:spPr>
         <p:txBody>
-          <a:bodyPr wrap="square" lIns="36576" rIns="36576" tIns="18288" bIns="18288" anchor="t">
+          <a:bodyPr wrap="square" lIns="36576" tIns="18288" rIns="36576" bIns="18288" anchor="t">
             <a:spAutoFit/>
           </a:bodyPr>
           <a:lstStyle/>
@@ -12734,7 +12378,7 @@
           </a:fontRef>
         </p:style>
         <p:txBody>
-          <a:bodyPr rtlCol="0" anchor="ctr" wrap="square" lIns="73152" rIns="73152"/>
+          <a:bodyPr wrap="square" lIns="73152" rIns="73152" rtlCol="0" anchor="ctr"/>
           <a:lstStyle/>
           <a:p>
             <a:pPr algn="ctr"/>
@@ -12767,7 +12411,7 @@
           <a:noFill/>
         </p:spPr>
         <p:txBody>
-          <a:bodyPr wrap="square" lIns="36576" rIns="36576" tIns="18288" bIns="18288" anchor="t">
+          <a:bodyPr wrap="square" lIns="36576" tIns="18288" rIns="36576" bIns="18288" anchor="t">
             <a:spAutoFit/>
           </a:bodyPr>
           <a:lstStyle/>
@@ -12837,6 +12481,7 @@
           <a:lstStyle/>
           <a:p>
             <a:pPr algn="ctr"/>
+            <a:endParaRPr/>
           </a:p>
         </p:txBody>
       </p:sp>
@@ -12877,7 +12522,7 @@
           </a:fontRef>
         </p:style>
         <p:txBody>
-          <a:bodyPr rtlCol="0" anchor="ctr" lIns="0" rIns="0" tIns="0" bIns="0"/>
+          <a:bodyPr lIns="0" tIns="0" rIns="0" bIns="0" rtlCol="0" anchor="ctr"/>
           <a:lstStyle/>
           <a:p>
             <a:pPr algn="ctr"/>
@@ -12910,7 +12555,7 @@
           <a:noFill/>
         </p:spPr>
         <p:txBody>
-          <a:bodyPr wrap="square" lIns="36576" rIns="36576" tIns="18288" bIns="18288" anchor="ctr">
+          <a:bodyPr wrap="square" lIns="36576" tIns="18288" rIns="36576" bIns="18288" anchor="ctr">
             <a:spAutoFit/>
           </a:bodyPr>
           <a:lstStyle/>
@@ -12980,6 +12625,7 @@
           <a:lstStyle/>
           <a:p>
             <a:pPr algn="ctr"/>
+            <a:endParaRPr/>
           </a:p>
         </p:txBody>
       </p:sp>
@@ -13020,7 +12666,7 @@
           </a:fontRef>
         </p:style>
         <p:txBody>
-          <a:bodyPr rtlCol="0" anchor="ctr" lIns="0" rIns="0" tIns="0" bIns="0"/>
+          <a:bodyPr lIns="0" tIns="0" rIns="0" bIns="0" rtlCol="0" anchor="ctr"/>
           <a:lstStyle/>
           <a:p>
             <a:pPr algn="ctr"/>
@@ -13053,7 +12699,7 @@
           <a:noFill/>
         </p:spPr>
         <p:txBody>
-          <a:bodyPr wrap="square" lIns="36576" rIns="36576" tIns="18288" bIns="18288" anchor="ctr">
+          <a:bodyPr wrap="square" lIns="36576" tIns="18288" rIns="36576" bIns="18288" anchor="ctr">
             <a:spAutoFit/>
           </a:bodyPr>
           <a:lstStyle/>
@@ -13123,6 +12769,7 @@
           <a:lstStyle/>
           <a:p>
             <a:pPr algn="ctr"/>
+            <a:endParaRPr/>
           </a:p>
         </p:txBody>
       </p:sp>
@@ -13163,7 +12810,7 @@
           </a:fontRef>
         </p:style>
         <p:txBody>
-          <a:bodyPr rtlCol="0" anchor="ctr" lIns="0" rIns="0" tIns="0" bIns="0"/>
+          <a:bodyPr lIns="0" tIns="0" rIns="0" bIns="0" rtlCol="0" anchor="ctr"/>
           <a:lstStyle/>
           <a:p>
             <a:pPr algn="ctr"/>
@@ -13196,7 +12843,7 @@
           <a:noFill/>
         </p:spPr>
         <p:txBody>
-          <a:bodyPr wrap="square" lIns="36576" rIns="36576" tIns="18288" bIns="18288" anchor="ctr">
+          <a:bodyPr wrap="square" lIns="36576" tIns="18288" rIns="36576" bIns="18288" anchor="ctr">
             <a:spAutoFit/>
           </a:bodyPr>
           <a:lstStyle/>
@@ -13266,6 +12913,7 @@
           <a:lstStyle/>
           <a:p>
             <a:pPr algn="ctr"/>
+            <a:endParaRPr/>
           </a:p>
         </p:txBody>
       </p:sp>
@@ -13306,7 +12954,7 @@
           </a:fontRef>
         </p:style>
         <p:txBody>
-          <a:bodyPr rtlCol="0" anchor="ctr" lIns="0" rIns="0" tIns="0" bIns="0"/>
+          <a:bodyPr lIns="0" tIns="0" rIns="0" bIns="0" rtlCol="0" anchor="ctr"/>
           <a:lstStyle/>
           <a:p>
             <a:pPr algn="ctr"/>
@@ -13339,7 +12987,7 @@
           <a:noFill/>
         </p:spPr>
         <p:txBody>
-          <a:bodyPr wrap="square" lIns="36576" rIns="36576" tIns="18288" bIns="18288" anchor="ctr">
+          <a:bodyPr wrap="square" lIns="36576" tIns="18288" rIns="36576" bIns="18288" anchor="ctr">
             <a:spAutoFit/>
           </a:bodyPr>
           <a:lstStyle/>
@@ -13373,7 +13021,7 @@
 </file>
 
 <file path=ppt/slides/slide9.xml><?xml version="1.0" encoding="utf-8"?>
-<p:sld xmlns:a="http://schemas.openxmlformats.org/drawingml/2006/main" xmlns:p="http://schemas.openxmlformats.org/presentationml/2006/main" xmlns:r="http://schemas.openxmlformats.org/officeDocument/2006/relationships">
+<p:sld xmlns:a="http://schemas.openxmlformats.org/drawingml/2006/main" xmlns:r="http://schemas.openxmlformats.org/officeDocument/2006/relationships" xmlns:p="http://schemas.openxmlformats.org/presentationml/2006/main">
   <p:cSld>
     <p:spTree>
       <p:nvGrpSpPr>
@@ -13381,7 +13029,14 @@
         <p:cNvGrpSpPr/>
         <p:nvPr/>
       </p:nvGrpSpPr>
-      <p:grpSpPr/>
+      <p:grpSpPr>
+        <a:xfrm>
+          <a:off x="0" y="0"/>
+          <a:ext cx="0" cy="0"/>
+          <a:chOff x="0" y="0"/>
+          <a:chExt cx="0" cy="0"/>
+        </a:xfrm>
+      </p:grpSpPr>
       <p:sp>
         <p:nvSpPr>
           <p:cNvPr id="2" name="Rectangle 1"/>
@@ -13423,6 +13078,7 @@
           <a:lstStyle/>
           <a:p>
             <a:pPr algn="ctr"/>
+            <a:endParaRPr/>
           </a:p>
         </p:txBody>
       </p:sp>
@@ -13443,7 +13099,7 @@
           <a:noFill/>
         </p:spPr>
         <p:txBody>
-          <a:bodyPr wrap="square" lIns="36576" rIns="36576" tIns="18288" bIns="18288" anchor="t">
+          <a:bodyPr wrap="square" lIns="36576" tIns="18288" rIns="36576" bIns="18288" anchor="t">
             <a:spAutoFit/>
           </a:bodyPr>
           <a:lstStyle/>
@@ -13509,7 +13165,7 @@
           </a:fontRef>
         </p:style>
         <p:txBody>
-          <a:bodyPr rtlCol="0" anchor="ctr" wrap="square" lIns="73152" rIns="73152"/>
+          <a:bodyPr wrap="square" lIns="73152" rIns="73152" rtlCol="0" anchor="ctr"/>
           <a:lstStyle/>
           <a:p>
             <a:pPr algn="ctr"/>
@@ -13542,7 +13198,7 @@
           <a:noFill/>
         </p:spPr>
         <p:txBody>
-          <a:bodyPr wrap="square" lIns="36576" rIns="36576" tIns="18288" bIns="18288" anchor="t">
+          <a:bodyPr wrap="square" lIns="36576" tIns="18288" rIns="36576" bIns="18288" anchor="t">
             <a:spAutoFit/>
           </a:bodyPr>
           <a:lstStyle/>
@@ -13584,7 +13240,7 @@
           <a:noFill/>
         </p:spPr>
         <p:txBody>
-          <a:bodyPr wrap="square" lIns="36576" rIns="36576" tIns="18288" bIns="18288" anchor="t">
+          <a:bodyPr wrap="square" lIns="36576" tIns="18288" rIns="36576" bIns="18288" anchor="t">
             <a:spAutoFit/>
           </a:bodyPr>
           <a:lstStyle/>
@@ -13626,7 +13282,7 @@
           <a:noFill/>
         </p:spPr>
         <p:txBody>
-          <a:bodyPr wrap="square" lIns="36576" rIns="36576" tIns="18288" bIns="18288" anchor="t">
+          <a:bodyPr wrap="square" lIns="36576" tIns="18288" rIns="36576" bIns="18288" anchor="t">
             <a:spAutoFit/>
           </a:bodyPr>
           <a:lstStyle/>
@@ -13668,7 +13324,7 @@
           <a:noFill/>
         </p:spPr>
         <p:txBody>
-          <a:bodyPr wrap="square" lIns="36576" rIns="36576" tIns="18288" bIns="18288" anchor="t">
+          <a:bodyPr wrap="square" lIns="36576" tIns="18288" rIns="36576" bIns="18288" anchor="t">
             <a:spAutoFit/>
           </a:bodyPr>
           <a:lstStyle/>
@@ -13710,7 +13366,7 @@
           <a:noFill/>
         </p:spPr>
         <p:txBody>
-          <a:bodyPr wrap="square" lIns="36576" rIns="36576" tIns="18288" bIns="18288" anchor="t">
+          <a:bodyPr wrap="square" lIns="36576" tIns="18288" rIns="36576" bIns="18288" anchor="t">
             <a:spAutoFit/>
           </a:bodyPr>
           <a:lstStyle/>
@@ -13752,7 +13408,7 @@
           <a:noFill/>
         </p:spPr>
         <p:txBody>
-          <a:bodyPr wrap="square" lIns="36576" rIns="36576" tIns="18288" bIns="18288" anchor="t">
+          <a:bodyPr wrap="square" lIns="36576" tIns="18288" rIns="36576" bIns="18288" anchor="t">
             <a:spAutoFit/>
           </a:bodyPr>
           <a:lstStyle/>
@@ -13794,7 +13450,7 @@
           <a:noFill/>
         </p:spPr>
         <p:txBody>
-          <a:bodyPr wrap="square" lIns="36576" rIns="36576" tIns="18288" bIns="18288" anchor="t">
+          <a:bodyPr wrap="square" lIns="36576" tIns="18288" rIns="36576" bIns="18288" anchor="t">
             <a:spAutoFit/>
           </a:bodyPr>
           <a:lstStyle/>
@@ -13836,7 +13492,7 @@
           <a:noFill/>
         </p:spPr>
         <p:txBody>
-          <a:bodyPr wrap="square" lIns="36576" rIns="36576" tIns="18288" bIns="18288" anchor="t">
+          <a:bodyPr wrap="square" lIns="36576" tIns="18288" rIns="36576" bIns="18288" anchor="t">
             <a:spAutoFit/>
           </a:bodyPr>
           <a:lstStyle/>
@@ -13878,7 +13534,7 @@
           <a:noFill/>
         </p:spPr>
         <p:txBody>
-          <a:bodyPr wrap="square" lIns="36576" rIns="36576" tIns="18288" bIns="18288" anchor="t">
+          <a:bodyPr wrap="square" lIns="36576" tIns="18288" rIns="36576" bIns="18288" anchor="t">
             <a:spAutoFit/>
           </a:bodyPr>
           <a:lstStyle/>
@@ -13946,6 +13602,7 @@
           <a:lstStyle/>
           <a:p>
             <a:pPr algn="ctr"/>
+            <a:endParaRPr/>
           </a:p>
         </p:txBody>
       </p:sp>
@@ -13966,7 +13623,7 @@
           <a:noFill/>
         </p:spPr>
         <p:txBody>
-          <a:bodyPr wrap="square" lIns="36576" rIns="36576" tIns="18288" bIns="18288" anchor="t">
+          <a:bodyPr wrap="square" lIns="36576" tIns="18288" rIns="36576" bIns="18288" anchor="t">
             <a:spAutoFit/>
           </a:bodyPr>
           <a:lstStyle/>
@@ -14008,7 +13665,7 @@
           <a:noFill/>
         </p:spPr>
         <p:txBody>
-          <a:bodyPr wrap="square" lIns="36576" rIns="36576" tIns="18288" bIns="18288" anchor="t">
+          <a:bodyPr wrap="square" lIns="36576" tIns="18288" rIns="36576" bIns="18288" anchor="t">
             <a:spAutoFit/>
           </a:bodyPr>
           <a:lstStyle/>
@@ -14050,7 +13707,7 @@
           <a:noFill/>
         </p:spPr>
         <p:txBody>
-          <a:bodyPr wrap="square" lIns="36576" rIns="36576" tIns="18288" bIns="18288" anchor="t">
+          <a:bodyPr wrap="square" lIns="36576" tIns="18288" rIns="36576" bIns="18288" anchor="t">
             <a:spAutoFit/>
           </a:bodyPr>
           <a:lstStyle/>
@@ -14092,7 +13749,7 @@
           <a:noFill/>
         </p:spPr>
         <p:txBody>
-          <a:bodyPr wrap="square" lIns="36576" rIns="36576" tIns="18288" bIns="18288" anchor="t">
+          <a:bodyPr wrap="square" lIns="36576" tIns="18288" rIns="36576" bIns="18288" anchor="t">
             <a:spAutoFit/>
           </a:bodyPr>
           <a:lstStyle/>
@@ -14134,7 +13791,7 @@
           <a:noFill/>
         </p:spPr>
         <p:txBody>
-          <a:bodyPr wrap="square" lIns="36576" rIns="36576" tIns="18288" bIns="18288" anchor="t">
+          <a:bodyPr wrap="square" lIns="36576" tIns="18288" rIns="36576" bIns="18288" anchor="t">
             <a:spAutoFit/>
           </a:bodyPr>
           <a:lstStyle/>
@@ -14176,7 +13833,7 @@
           <a:noFill/>
         </p:spPr>
         <p:txBody>
-          <a:bodyPr wrap="square" lIns="36576" rIns="36576" tIns="18288" bIns="18288" anchor="t">
+          <a:bodyPr wrap="square" lIns="36576" tIns="18288" rIns="36576" bIns="18288" anchor="t">
             <a:spAutoFit/>
           </a:bodyPr>
           <a:lstStyle/>
@@ -14218,7 +13875,7 @@
           <a:noFill/>
         </p:spPr>
         <p:txBody>
-          <a:bodyPr wrap="square" lIns="36576" rIns="36576" tIns="18288" bIns="18288" anchor="t">
+          <a:bodyPr wrap="square" lIns="36576" tIns="18288" rIns="36576" bIns="18288" anchor="t">
             <a:spAutoFit/>
           </a:bodyPr>
           <a:lstStyle/>
@@ -14285,7 +13942,7 @@
           </a:fontRef>
         </p:style>
         <p:txBody>
-          <a:bodyPr rtlCol="0" anchor="ctr" wrap="square"/>
+          <a:bodyPr wrap="square" rtlCol="0" anchor="ctr"/>
           <a:lstStyle/>
           <a:p>
             <a:pPr algn="ctr"/>
@@ -14318,7 +13975,7 @@
           <a:noFill/>
         </p:spPr>
         <p:txBody>
-          <a:bodyPr wrap="square" lIns="36576" rIns="36576" tIns="18288" bIns="18288" anchor="t">
+          <a:bodyPr wrap="square" lIns="36576" tIns="18288" rIns="36576" bIns="18288" anchor="t">
             <a:spAutoFit/>
           </a:bodyPr>
           <a:lstStyle/>
@@ -14360,7 +14017,7 @@
           <a:noFill/>
         </p:spPr>
         <p:txBody>
-          <a:bodyPr wrap="square" lIns="36576" rIns="36576" tIns="18288" bIns="18288" anchor="t">
+          <a:bodyPr wrap="square" lIns="36576" tIns="18288" rIns="36576" bIns="18288" anchor="t">
             <a:spAutoFit/>
           </a:bodyPr>
           <a:lstStyle/>
@@ -14724,44 +14381,44 @@
         <a:sysClr val="window" lastClr="FFFFFF"/>
       </a:lt1>
       <a:dk2>
-        <a:srgbClr val="1F497D"/>
+        <a:srgbClr val="0E2841"/>
       </a:dk2>
       <a:lt2>
-        <a:srgbClr val="EEECE1"/>
+        <a:srgbClr val="E8E8E8"/>
       </a:lt2>
       <a:accent1>
-        <a:srgbClr val="4F81BD"/>
+        <a:srgbClr val="156082"/>
       </a:accent1>
       <a:accent2>
-        <a:srgbClr val="C0504D"/>
+        <a:srgbClr val="E97132"/>
       </a:accent2>
       <a:accent3>
-        <a:srgbClr val="9BBB59"/>
+        <a:srgbClr val="196B24"/>
       </a:accent3>
       <a:accent4>
-        <a:srgbClr val="8064A2"/>
+        <a:srgbClr val="0F9ED5"/>
       </a:accent4>
       <a:accent5>
-        <a:srgbClr val="4BACC6"/>
+        <a:srgbClr val="A02B93"/>
       </a:accent5>
       <a:accent6>
-        <a:srgbClr val="F79646"/>
+        <a:srgbClr val="4EA72E"/>
       </a:accent6>
       <a:hlink>
-        <a:srgbClr val="0000FF"/>
+        <a:srgbClr val="467886"/>
       </a:hlink>
       <a:folHlink>
-        <a:srgbClr val="800080"/>
+        <a:srgbClr val="96607D"/>
       </a:folHlink>
     </a:clrScheme>
     <a:fontScheme name="Office">
       <a:majorFont>
-        <a:latin typeface="Calibri"/>
+        <a:latin typeface="Aptos Display" panose="02110004020202020204"/>
         <a:ea typeface=""/>
         <a:cs typeface=""/>
-        <a:font script="Jpan" typeface="ＭＳ Ｐゴシック"/>
+        <a:font script="Jpan" typeface="游ゴシック Light"/>
         <a:font script="Hang" typeface="맑은 고딕"/>
-        <a:font script="Hans" typeface="宋体"/>
+        <a:font script="Hans" typeface="等线 Light"/>
         <a:font script="Hant" typeface="新細明體"/>
         <a:font script="Arab" typeface="Times New Roman"/>
         <a:font script="Hebr" typeface="Times New Roman"/>
@@ -14789,14 +14446,31 @@
         <a:font script="Viet" typeface="Times New Roman"/>
         <a:font script="Uigh" typeface="Microsoft Uighur"/>
         <a:font script="Geor" typeface="Sylfaen"/>
+        <a:font script="Armn" typeface="Arial"/>
+        <a:font script="Bugi" typeface="Leelawadee UI"/>
+        <a:font script="Bopo" typeface="Microsoft JhengHei"/>
+        <a:font script="Java" typeface="Javanese Text"/>
+        <a:font script="Lisu" typeface="Segoe UI"/>
+        <a:font script="Mymr" typeface="Myanmar Text"/>
+        <a:font script="Nkoo" typeface="Ebrima"/>
+        <a:font script="Olck" typeface="Nirmala UI"/>
+        <a:font script="Osma" typeface="Ebrima"/>
+        <a:font script="Phag" typeface="Phagspa"/>
+        <a:font script="Syrn" typeface="Estrangelo Edessa"/>
+        <a:font script="Syrj" typeface="Estrangelo Edessa"/>
+        <a:font script="Syre" typeface="Estrangelo Edessa"/>
+        <a:font script="Sora" typeface="Nirmala UI"/>
+        <a:font script="Tale" typeface="Microsoft Tai Le"/>
+        <a:font script="Talu" typeface="Microsoft New Tai Lue"/>
+        <a:font script="Tfng" typeface="Ebrima"/>
       </a:majorFont>
       <a:minorFont>
-        <a:latin typeface="Calibri"/>
+        <a:latin typeface="Aptos" panose="02110004020202020204"/>
         <a:ea typeface=""/>
         <a:cs typeface=""/>
-        <a:font script="Jpan" typeface="ＭＳ Ｐゴシック"/>
+        <a:font script="Jpan" typeface="游ゴシック"/>
         <a:font script="Hang" typeface="맑은 고딕"/>
-        <a:font script="Hans" typeface="宋体"/>
+        <a:font script="Hans" typeface="等线"/>
         <a:font script="Hant" typeface="新細明體"/>
         <a:font script="Arab" typeface="Arial"/>
         <a:font script="Hebr" typeface="Arial"/>
@@ -14824,6 +14498,23 @@
         <a:font script="Viet" typeface="Arial"/>
         <a:font script="Uigh" typeface="Microsoft Uighur"/>
         <a:font script="Geor" typeface="Sylfaen"/>
+        <a:font script="Armn" typeface="Arial"/>
+        <a:font script="Bugi" typeface="Leelawadee UI"/>
+        <a:font script="Bopo" typeface="Microsoft JhengHei"/>
+        <a:font script="Java" typeface="Javanese Text"/>
+        <a:font script="Lisu" typeface="Segoe UI"/>
+        <a:font script="Mymr" typeface="Myanmar Text"/>
+        <a:font script="Nkoo" typeface="Ebrima"/>
+        <a:font script="Olck" typeface="Nirmala UI"/>
+        <a:font script="Osma" typeface="Ebrima"/>
+        <a:font script="Phag" typeface="Phagspa"/>
+        <a:font script="Syrn" typeface="Estrangelo Edessa"/>
+        <a:font script="Syrj" typeface="Estrangelo Edessa"/>
+        <a:font script="Syre" typeface="Estrangelo Edessa"/>
+        <a:font script="Sora" typeface="Nirmala UI"/>
+        <a:font script="Tale" typeface="Microsoft Tai Le"/>
+        <a:font script="Talu" typeface="Microsoft New Tai Lue"/>
+        <a:font script="Tfng" typeface="Ebrima"/>
       </a:minorFont>
     </a:fontScheme>
     <a:fmtScheme name="Office">
@@ -14835,180 +14526,136 @@
           <a:gsLst>
             <a:gs pos="0">
               <a:schemeClr val="phClr">
-                <a:tint val="50000"/>
-                <a:satMod val="300000"/>
+                <a:lumMod val="110000"/>
+                <a:satMod val="105000"/>
+                <a:tint val="67000"/>
               </a:schemeClr>
             </a:gs>
-            <a:gs pos="35000">
+            <a:gs pos="50000">
               <a:schemeClr val="phClr">
-                <a:tint val="37000"/>
-                <a:satMod val="300000"/>
+                <a:lumMod val="105000"/>
+                <a:satMod val="103000"/>
+                <a:tint val="73000"/>
               </a:schemeClr>
             </a:gs>
             <a:gs pos="100000">
               <a:schemeClr val="phClr">
-                <a:tint val="15000"/>
-                <a:satMod val="350000"/>
+                <a:lumMod val="105000"/>
+                <a:satMod val="109000"/>
+                <a:tint val="81000"/>
               </a:schemeClr>
             </a:gs>
           </a:gsLst>
-          <a:lin ang="16200000" scaled="1"/>
+          <a:lin ang="5400000" scaled="0"/>
         </a:gradFill>
         <a:gradFill rotWithShape="1">
           <a:gsLst>
             <a:gs pos="0">
               <a:schemeClr val="phClr">
-                <a:tint val="100000"/>
+                <a:satMod val="103000"/>
+                <a:lumMod val="102000"/>
+                <a:tint val="94000"/>
+              </a:schemeClr>
+            </a:gs>
+            <a:gs pos="50000">
+              <a:schemeClr val="phClr">
+                <a:satMod val="110000"/>
+                <a:lumMod val="100000"/>
                 <a:shade val="100000"/>
-                <a:satMod val="130000"/>
               </a:schemeClr>
             </a:gs>
             <a:gs pos="100000">
               <a:schemeClr val="phClr">
-                <a:tint val="50000"/>
-                <a:shade val="100000"/>
-                <a:satMod val="350000"/>
+                <a:lumMod val="99000"/>
+                <a:satMod val="120000"/>
+                <a:shade val="78000"/>
               </a:schemeClr>
             </a:gs>
           </a:gsLst>
-          <a:lin ang="16200000" scaled="0"/>
+          <a:lin ang="5400000" scaled="0"/>
         </a:gradFill>
       </a:fillStyleLst>
       <a:lnStyleLst>
-        <a:ln w="9525" cap="flat" cmpd="sng" algn="ctr">
+        <a:ln w="12700" cap="flat" cmpd="sng" algn="ctr">
           <a:solidFill>
-            <a:schemeClr val="phClr">
-              <a:shade val="95000"/>
-              <a:satMod val="105000"/>
-            </a:schemeClr>
+            <a:schemeClr val="phClr"/>
           </a:solidFill>
           <a:prstDash val="solid"/>
+          <a:miter lim="800000"/>
+        </a:ln>
+        <a:ln w="19050" cap="flat" cmpd="sng" algn="ctr">
+          <a:solidFill>
+            <a:schemeClr val="phClr"/>
+          </a:solidFill>
+          <a:prstDash val="solid"/>
+          <a:miter lim="800000"/>
         </a:ln>
         <a:ln w="25400" cap="flat" cmpd="sng" algn="ctr">
           <a:solidFill>
             <a:schemeClr val="phClr"/>
           </a:solidFill>
           <a:prstDash val="solid"/>
-        </a:ln>
-        <a:ln w="38100" cap="flat" cmpd="sng" algn="ctr">
-          <a:solidFill>
-            <a:schemeClr val="phClr"/>
-          </a:solidFill>
-          <a:prstDash val="solid"/>
+          <a:miter lim="800000"/>
         </a:ln>
       </a:lnStyleLst>
       <a:effectStyleLst>
         <a:effectStyle>
+          <a:effectLst/>
+        </a:effectStyle>
+        <a:effectStyle>
+          <a:effectLst/>
+        </a:effectStyle>
+        <a:effectStyle>
           <a:effectLst>
-            <a:outerShdw blurRad="40000" dist="20000" dir="5400000" rotWithShape="0">
+            <a:outerShdw blurRad="57150" dist="19050" dir="5400000" algn="ctr" rotWithShape="0">
               <a:srgbClr val="000000">
-                <a:alpha val="38000"/>
+                <a:alpha val="63000"/>
               </a:srgbClr>
             </a:outerShdw>
           </a:effectLst>
-        </a:effectStyle>
-        <a:effectStyle>
-          <a:effectLst>
-            <a:outerShdw blurRad="40000" dist="23000" dir="5400000" rotWithShape="0">
-              <a:srgbClr val="000000">
-                <a:alpha val="35000"/>
-              </a:srgbClr>
-            </a:outerShdw>
-          </a:effectLst>
-        </a:effectStyle>
-        <a:effectStyle>
-          <a:effectLst>
-            <a:outerShdw blurRad="40000" dist="23000" dir="5400000" rotWithShape="0">
-              <a:srgbClr val="000000">
-                <a:alpha val="35000"/>
-              </a:srgbClr>
-            </a:outerShdw>
-          </a:effectLst>
-          <a:scene3d>
-            <a:camera prst="orthographicFront">
-              <a:rot lat="0" lon="0" rev="0"/>
-            </a:camera>
-            <a:lightRig rig="threePt" dir="t">
-              <a:rot lat="0" lon="0" rev="1200000"/>
-            </a:lightRig>
-          </a:scene3d>
-          <a:sp3d>
-            <a:bevelT w="63500" h="25400"/>
-          </a:sp3d>
         </a:effectStyle>
       </a:effectStyleLst>
       <a:bgFillStyleLst>
         <a:solidFill>
           <a:schemeClr val="phClr"/>
         </a:solidFill>
+        <a:solidFill>
+          <a:schemeClr val="phClr">
+            <a:tint val="95000"/>
+            <a:satMod val="170000"/>
+          </a:schemeClr>
+        </a:solidFill>
         <a:gradFill rotWithShape="1">
           <a:gsLst>
             <a:gs pos="0">
               <a:schemeClr val="phClr">
-                <a:tint val="40000"/>
-                <a:satMod val="350000"/>
+                <a:tint val="93000"/>
+                <a:satMod val="150000"/>
+                <a:shade val="98000"/>
+                <a:lumMod val="102000"/>
               </a:schemeClr>
             </a:gs>
-            <a:gs pos="40000">
+            <a:gs pos="50000">
               <a:schemeClr val="phClr">
-                <a:tint val="45000"/>
-                <a:shade val="99000"/>
-                <a:satMod val="350000"/>
+                <a:tint val="98000"/>
+                <a:satMod val="130000"/>
+                <a:shade val="90000"/>
+                <a:lumMod val="103000"/>
               </a:schemeClr>
             </a:gs>
             <a:gs pos="100000">
               <a:schemeClr val="phClr">
-                <a:shade val="20000"/>
-                <a:satMod val="255000"/>
+                <a:shade val="63000"/>
+                <a:satMod val="120000"/>
               </a:schemeClr>
             </a:gs>
           </a:gsLst>
-          <a:path path="circle">
-            <a:fillToRect l="50000" t="-80000" r="50000" b="180000"/>
-          </a:path>
-        </a:gradFill>
-        <a:gradFill rotWithShape="1">
-          <a:gsLst>
-            <a:gs pos="0">
-              <a:schemeClr val="phClr">
-                <a:tint val="80000"/>
-                <a:satMod val="300000"/>
-              </a:schemeClr>
-            </a:gs>
-            <a:gs pos="100000">
-              <a:schemeClr val="phClr">
-                <a:shade val="30000"/>
-                <a:satMod val="200000"/>
-              </a:schemeClr>
-            </a:gs>
-          </a:gsLst>
-          <a:path path="circle">
-            <a:fillToRect l="50000" t="50000" r="50000" b="50000"/>
-          </a:path>
+          <a:lin ang="5400000" scaled="0"/>
         </a:gradFill>
       </a:bgFillStyleLst>
     </a:fmtScheme>
   </a:themeElements>
   <a:objectDefaults>
-    <a:spDef>
-      <a:spPr/>
-      <a:bodyPr/>
-      <a:lstStyle/>
-      <a:style>
-        <a:lnRef idx="1">
-          <a:schemeClr val="accent1"/>
-        </a:lnRef>
-        <a:fillRef idx="3">
-          <a:schemeClr val="accent1"/>
-        </a:fillRef>
-        <a:effectRef idx="2">
-          <a:schemeClr val="accent1"/>
-        </a:effectRef>
-        <a:fontRef idx="minor">
-          <a:schemeClr val="lt1"/>
-        </a:fontRef>
-      </a:style>
-    </a:spDef>
     <a:lnDef>
       <a:spPr/>
       <a:bodyPr/>
@@ -15030,5 +14677,10 @@
     </a:lnDef>
   </a:objectDefaults>
   <a:extraClrSchemeLst/>
+  <a:extLst>
+    <a:ext uri="{05A4C25C-085E-4340-85A3-A5531E510DB2}">
+      <thm15:themeFamily xmlns:thm15="http://schemas.microsoft.com/office/thememl/2012/main" name="Office Theme" id="{2E142A2C-CD16-42D6-873A-C26D2A0506FA}" vid="{1BDDFF52-6CD6-40A5-AB3C-68EB2F1E4D0A}"/>
+    </a:ext>
+  </a:extLst>
 </a:theme>
 </file>